--- a/Supp Data/Fig 4.pptx
+++ b/Supp Data/Fig 4.pptx
@@ -2,15 +2,15 @@
 <file path=ppt/presentation.xml><?xml version="1.0" encoding="utf-8"?>
 <p:presentation xmlns:a="http://schemas.openxmlformats.org/drawingml/2006/main" xmlns:r="http://schemas.openxmlformats.org/officeDocument/2006/relationships" xmlns:p="http://schemas.openxmlformats.org/presentationml/2006/main" saveSubsetFonts="1" autoCompressPictures="0">
   <p:sldMasterIdLst>
-    <p:sldMasterId id="2147483996" r:id="rId1"/>
+    <p:sldMasterId id="2147484068" r:id="rId1"/>
   </p:sldMasterIdLst>
   <p:notesMasterIdLst>
     <p:notesMasterId r:id="rId3"/>
   </p:notesMasterIdLst>
   <p:sldIdLst>
-    <p:sldId id="280" r:id="rId2"/>
+    <p:sldId id="282" r:id="rId2"/>
   </p:sldIdLst>
-  <p:sldSz cx="2087563" cy="954088"/>
+  <p:sldSz cx="1655763" cy="917575"/>
   <p:notesSz cx="6858000" cy="9144000"/>
   <p:defaultTextStyle>
     <a:defPPr>
@@ -197,7 +197,7 @@
           <a:p>
             <a:fld id="{810CFC23-F338-EB41-8653-4316F1EF48B5}" type="datetimeFigureOut">
               <a:rPr lang="en-DE" smtClean="0"/>
-              <a:t>13.05.26</a:t>
+              <a:t>15.05.26</a:t>
             </a:fld>
             <a:endParaRPr lang="en-DE"/>
           </a:p>
@@ -215,8 +215,8 @@
         </p:nvSpPr>
         <p:spPr>
           <a:xfrm>
-            <a:off x="53975" y="1143000"/>
-            <a:ext cx="6750050" cy="3086100"/>
+            <a:off x="644525" y="1143000"/>
+            <a:ext cx="5568950" cy="3086100"/>
           </a:xfrm>
           <a:prstGeom prst="rect">
             <a:avLst/>
@@ -371,8 +371,8 @@
   </p:cSld>
   <p:clrMap bg1="lt1" tx1="dk1" bg2="lt2" tx2="dk2" accent1="accent1" accent2="accent2" accent3="accent3" accent4="accent4" accent5="accent5" accent6="accent6" hlink="hlink" folHlink="folHlink"/>
   <p:notesStyle>
-    <a:lvl1pPr marL="0" algn="l" defTabSz="143509" rtl="0" eaLnBrk="1" latinLnBrk="0" hangingPunct="1">
-      <a:defRPr sz="189" kern="1200">
+    <a:lvl1pPr marL="0" algn="l" defTabSz="200581" rtl="0" eaLnBrk="1" latinLnBrk="0" hangingPunct="1">
+      <a:defRPr sz="263" kern="1200">
         <a:solidFill>
           <a:schemeClr val="tx1"/>
         </a:solidFill>
@@ -381,8 +381,8 @@
         <a:cs typeface="+mn-cs"/>
       </a:defRPr>
     </a:lvl1pPr>
-    <a:lvl2pPr marL="71755" algn="l" defTabSz="143509" rtl="0" eaLnBrk="1" latinLnBrk="0" hangingPunct="1">
-      <a:defRPr sz="189" kern="1200">
+    <a:lvl2pPr marL="100289" algn="l" defTabSz="200581" rtl="0" eaLnBrk="1" latinLnBrk="0" hangingPunct="1">
+      <a:defRPr sz="263" kern="1200">
         <a:solidFill>
           <a:schemeClr val="tx1"/>
         </a:solidFill>
@@ -391,8 +391,8 @@
         <a:cs typeface="+mn-cs"/>
       </a:defRPr>
     </a:lvl2pPr>
-    <a:lvl3pPr marL="143509" algn="l" defTabSz="143509" rtl="0" eaLnBrk="1" latinLnBrk="0" hangingPunct="1">
-      <a:defRPr sz="189" kern="1200">
+    <a:lvl3pPr marL="200581" algn="l" defTabSz="200581" rtl="0" eaLnBrk="1" latinLnBrk="0" hangingPunct="1">
+      <a:defRPr sz="263" kern="1200">
         <a:solidFill>
           <a:schemeClr val="tx1"/>
         </a:solidFill>
@@ -401,8 +401,8 @@
         <a:cs typeface="+mn-cs"/>
       </a:defRPr>
     </a:lvl3pPr>
-    <a:lvl4pPr marL="215264" algn="l" defTabSz="143509" rtl="0" eaLnBrk="1" latinLnBrk="0" hangingPunct="1">
-      <a:defRPr sz="189" kern="1200">
+    <a:lvl4pPr marL="300869" algn="l" defTabSz="200581" rtl="0" eaLnBrk="1" latinLnBrk="0" hangingPunct="1">
+      <a:defRPr sz="263" kern="1200">
         <a:solidFill>
           <a:schemeClr val="tx1"/>
         </a:solidFill>
@@ -411,8 +411,8 @@
         <a:cs typeface="+mn-cs"/>
       </a:defRPr>
     </a:lvl4pPr>
-    <a:lvl5pPr marL="287019" algn="l" defTabSz="143509" rtl="0" eaLnBrk="1" latinLnBrk="0" hangingPunct="1">
-      <a:defRPr sz="189" kern="1200">
+    <a:lvl5pPr marL="401159" algn="l" defTabSz="200581" rtl="0" eaLnBrk="1" latinLnBrk="0" hangingPunct="1">
+      <a:defRPr sz="263" kern="1200">
         <a:solidFill>
           <a:schemeClr val="tx1"/>
         </a:solidFill>
@@ -421,8 +421,8 @@
         <a:cs typeface="+mn-cs"/>
       </a:defRPr>
     </a:lvl5pPr>
-    <a:lvl6pPr marL="358774" algn="l" defTabSz="143509" rtl="0" eaLnBrk="1" latinLnBrk="0" hangingPunct="1">
-      <a:defRPr sz="189" kern="1200">
+    <a:lvl6pPr marL="501449" algn="l" defTabSz="200581" rtl="0" eaLnBrk="1" latinLnBrk="0" hangingPunct="1">
+      <a:defRPr sz="263" kern="1200">
         <a:solidFill>
           <a:schemeClr val="tx1"/>
         </a:solidFill>
@@ -431,8 +431,8 @@
         <a:cs typeface="+mn-cs"/>
       </a:defRPr>
     </a:lvl6pPr>
-    <a:lvl7pPr marL="430527" algn="l" defTabSz="143509" rtl="0" eaLnBrk="1" latinLnBrk="0" hangingPunct="1">
-      <a:defRPr sz="189" kern="1200">
+    <a:lvl7pPr marL="601740" algn="l" defTabSz="200581" rtl="0" eaLnBrk="1" latinLnBrk="0" hangingPunct="1">
+      <a:defRPr sz="263" kern="1200">
         <a:solidFill>
           <a:schemeClr val="tx1"/>
         </a:solidFill>
@@ -441,8 +441,8 @@
         <a:cs typeface="+mn-cs"/>
       </a:defRPr>
     </a:lvl7pPr>
-    <a:lvl8pPr marL="502284" algn="l" defTabSz="143509" rtl="0" eaLnBrk="1" latinLnBrk="0" hangingPunct="1">
-      <a:defRPr sz="189" kern="1200">
+    <a:lvl8pPr marL="702030" algn="l" defTabSz="200581" rtl="0" eaLnBrk="1" latinLnBrk="0" hangingPunct="1">
+      <a:defRPr sz="263" kern="1200">
         <a:solidFill>
           <a:schemeClr val="tx1"/>
         </a:solidFill>
@@ -451,8 +451,8 @@
         <a:cs typeface="+mn-cs"/>
       </a:defRPr>
     </a:lvl8pPr>
-    <a:lvl9pPr marL="574037" algn="l" defTabSz="143509" rtl="0" eaLnBrk="1" latinLnBrk="0" hangingPunct="1">
-      <a:defRPr sz="189" kern="1200">
+    <a:lvl9pPr marL="802318" algn="l" defTabSz="200581" rtl="0" eaLnBrk="1" latinLnBrk="0" hangingPunct="1">
+      <a:defRPr sz="263" kern="1200">
         <a:solidFill>
           <a:schemeClr val="tx1"/>
         </a:solidFill>
@@ -494,8 +494,8 @@
         </p:nvSpPr>
         <p:spPr>
           <a:xfrm>
-            <a:off x="53975" y="1143000"/>
-            <a:ext cx="6750050" cy="3086100"/>
+            <a:off x="644525" y="1143000"/>
+            <a:ext cx="5568950" cy="3086100"/>
           </a:xfrm>
         </p:spPr>
       </p:sp>
@@ -514,742 +514,8 @@
           <a:bodyPr/>
           <a:lstStyle/>
           <a:p>
-            <a:r>
-              <a:rPr lang="en-DE" dirty="0"/>
-              <a:t>Main plot 1)</a:t>
-            </a:r>
-          </a:p>
-          <a:p>
             <a:endParaRPr lang="en-DE" dirty="0"/>
           </a:p>
-          <a:p>
-            <a:r>
-              <a:rPr lang="en-DE" dirty="0"/>
-              <a:t>From CS ref,</a:t>
-            </a:r>
-          </a:p>
-          <a:p>
-            <a:endParaRPr lang="en-DE" dirty="0"/>
-          </a:p>
-          <a:p>
-            <a:r>
-              <a:rPr lang="en-GB" dirty="0"/>
-              <a:t>T</a:t>
-            </a:r>
-            <a:r>
-              <a:rPr lang="en-DE" dirty="0"/>
-              <a:t>op left: transcriptome PCA</a:t>
-            </a:r>
-          </a:p>
-          <a:p>
-            <a:pPr marL="0" marR="0" lvl="0" indent="0" algn="l" defTabSz="914400" rtl="0" eaLnBrk="1" fontAlgn="auto" latinLnBrk="0" hangingPunct="1">
-              <a:lnSpc>
-                <a:spcPct val="100000"/>
-              </a:lnSpc>
-              <a:spcBef>
-                <a:spcPts val="0"/>
-              </a:spcBef>
-              <a:spcAft>
-                <a:spcPts val="0"/>
-              </a:spcAft>
-              <a:buClrTx/>
-              <a:buSzTx/>
-              <a:buFontTx/>
-              <a:buNone/>
-              <a:tabLst/>
-              <a:defRPr/>
-            </a:pPr>
-            <a:r>
-              <a:rPr lang="en-GB" dirty="0"/>
-              <a:t>T</a:t>
-            </a:r>
-            <a:r>
-              <a:rPr lang="en-DE" dirty="0"/>
-              <a:t>op right: genotype PCA</a:t>
-            </a:r>
-          </a:p>
-          <a:p>
-            <a:pPr marL="0" marR="0" lvl="0" indent="0" algn="l" defTabSz="914400" rtl="0" eaLnBrk="1" fontAlgn="auto" latinLnBrk="0" hangingPunct="1">
-              <a:lnSpc>
-                <a:spcPct val="100000"/>
-              </a:lnSpc>
-              <a:spcBef>
-                <a:spcPts val="0"/>
-              </a:spcBef>
-              <a:spcAft>
-                <a:spcPts val="0"/>
-              </a:spcAft>
-              <a:buClrTx/>
-              <a:buSzTx/>
-              <a:buFontTx/>
-              <a:buNone/>
-              <a:tabLst/>
-              <a:defRPr/>
-            </a:pPr>
-            <a:r>
-              <a:rPr lang="en-DE" dirty="0"/>
-              <a:t>Bottom left: Venn</a:t>
-            </a:r>
-          </a:p>
-          <a:p>
-            <a:pPr marL="0" marR="0" lvl="0" indent="0" algn="l" defTabSz="914400" rtl="0" eaLnBrk="1" fontAlgn="auto" latinLnBrk="0" hangingPunct="1">
-              <a:lnSpc>
-                <a:spcPct val="100000"/>
-              </a:lnSpc>
-              <a:spcBef>
-                <a:spcPts val="0"/>
-              </a:spcBef>
-              <a:spcAft>
-                <a:spcPts val="0"/>
-              </a:spcAft>
-              <a:buClrTx/>
-              <a:buSzTx/>
-              <a:buFontTx/>
-              <a:buNone/>
-              <a:tabLst/>
-              <a:defRPr/>
-            </a:pPr>
-            <a:r>
-              <a:rPr lang="en-GB" dirty="0"/>
-              <a:t>T</a:t>
-            </a:r>
-            <a:r>
-              <a:rPr lang="en-DE" dirty="0"/>
-              <a:t>op right: Go analysis</a:t>
-            </a:r>
-          </a:p>
-          <a:p>
-            <a:pPr marL="0" marR="0" lvl="0" indent="0" algn="l" defTabSz="914400" rtl="0" eaLnBrk="1" fontAlgn="auto" latinLnBrk="0" hangingPunct="1">
-              <a:lnSpc>
-                <a:spcPct val="100000"/>
-              </a:lnSpc>
-              <a:spcBef>
-                <a:spcPts val="0"/>
-              </a:spcBef>
-              <a:spcAft>
-                <a:spcPts val="0"/>
-              </a:spcAft>
-              <a:buClrTx/>
-              <a:buSzTx/>
-              <a:buFontTx/>
-              <a:buNone/>
-              <a:tabLst/>
-              <a:defRPr/>
-            </a:pPr>
-            <a:endParaRPr lang="en-DE" dirty="0"/>
-          </a:p>
-          <a:p>
-            <a:pPr marL="0" marR="0" lvl="0" indent="0" algn="l" defTabSz="914400" rtl="0" eaLnBrk="1" fontAlgn="auto" latinLnBrk="0" hangingPunct="1">
-              <a:lnSpc>
-                <a:spcPct val="100000"/>
-              </a:lnSpc>
-              <a:spcBef>
-                <a:spcPts val="0"/>
-              </a:spcBef>
-              <a:spcAft>
-                <a:spcPts val="0"/>
-              </a:spcAft>
-              <a:buClrTx/>
-              <a:buSzTx/>
-              <a:buFontTx/>
-              <a:buNone/>
-              <a:tabLst/>
-              <a:defRPr/>
-            </a:pPr>
-            <a:r>
-              <a:rPr lang="en-GB" dirty="0"/>
-              <a:t>I</a:t>
-            </a:r>
-            <a:r>
-              <a:rPr lang="en-DE" dirty="0"/>
-              <a:t>f splitting the venn up, there are the numbers</a:t>
-            </a:r>
-          </a:p>
-          <a:p>
-            <a:pPr marL="0" marR="0" lvl="0" indent="0" algn="l" defTabSz="914400" rtl="0" eaLnBrk="1" fontAlgn="auto" latinLnBrk="0" hangingPunct="1">
-              <a:lnSpc>
-                <a:spcPct val="100000"/>
-              </a:lnSpc>
-              <a:spcBef>
-                <a:spcPts val="0"/>
-              </a:spcBef>
-              <a:spcAft>
-                <a:spcPts val="0"/>
-              </a:spcAft>
-              <a:buClrTx/>
-              <a:buSzTx/>
-              <a:buFontTx/>
-              <a:buNone/>
-              <a:tabLst/>
-              <a:defRPr/>
-            </a:pPr>
-            <a:r>
-              <a:rPr lang="en-GB" dirty="0"/>
-              <a:t>&gt; </a:t>
-            </a:r>
-            <a:r>
-              <a:rPr lang="en-GB" dirty="0" err="1"/>
-              <a:t>nrow</a:t>
-            </a:r>
-            <a:r>
-              <a:rPr lang="en-GB" dirty="0"/>
-              <a:t>(</a:t>
-            </a:r>
-            <a:r>
-              <a:rPr lang="en-GB" dirty="0" err="1"/>
-              <a:t>all.CSvP</a:t>
-            </a:r>
-            <a:r>
-              <a:rPr lang="en-GB" dirty="0"/>
-              <a:t>[</a:t>
-            </a:r>
-            <a:r>
-              <a:rPr lang="en-GB" dirty="0" err="1"/>
-              <a:t>all.CSvP$adj.P.Val</a:t>
-            </a:r>
-            <a:r>
-              <a:rPr lang="en-GB" dirty="0"/>
-              <a:t> &lt; 0.05 &amp; </a:t>
-            </a:r>
-            <a:r>
-              <a:rPr lang="en-GB" dirty="0" err="1"/>
-              <a:t>all.CSvP</a:t>
-            </a:r>
-            <a:r>
-              <a:rPr lang="en-GB" dirty="0"/>
-              <a:t> &gt; 0.58 &amp; </a:t>
-            </a:r>
-            <a:r>
-              <a:rPr lang="en-GB" dirty="0" err="1"/>
-              <a:t>all.CS_PvCSxP$adj.P.Val</a:t>
-            </a:r>
-            <a:r>
-              <a:rPr lang="en-GB" dirty="0"/>
-              <a:t> &lt; 0.05 &amp; </a:t>
-            </a:r>
-            <a:r>
-              <a:rPr lang="en-GB" dirty="0" err="1"/>
-              <a:t>all.CS_PvCSxP$logFC</a:t>
-            </a:r>
-            <a:r>
-              <a:rPr lang="en-GB" dirty="0"/>
-              <a:t> &gt; 0.58,])</a:t>
-            </a:r>
-          </a:p>
-          <a:p>
-            <a:pPr marL="0" marR="0" lvl="0" indent="0" algn="l" defTabSz="914400" rtl="0" eaLnBrk="1" fontAlgn="auto" latinLnBrk="0" hangingPunct="1">
-              <a:lnSpc>
-                <a:spcPct val="100000"/>
-              </a:lnSpc>
-              <a:spcBef>
-                <a:spcPts val="0"/>
-              </a:spcBef>
-              <a:spcAft>
-                <a:spcPts val="0"/>
-              </a:spcAft>
-              <a:buClrTx/>
-              <a:buSzTx/>
-              <a:buFontTx/>
-              <a:buNone/>
-              <a:tabLst/>
-              <a:defRPr/>
-            </a:pPr>
-            <a:r>
-              <a:rPr lang="en-GB" dirty="0"/>
-              <a:t>[1] 3030</a:t>
-            </a:r>
-          </a:p>
-          <a:p>
-            <a:pPr marL="0" marR="0" lvl="0" indent="0" algn="l" defTabSz="914400" rtl="0" eaLnBrk="1" fontAlgn="auto" latinLnBrk="0" hangingPunct="1">
-              <a:lnSpc>
-                <a:spcPct val="100000"/>
-              </a:lnSpc>
-              <a:spcBef>
-                <a:spcPts val="0"/>
-              </a:spcBef>
-              <a:spcAft>
-                <a:spcPts val="0"/>
-              </a:spcAft>
-              <a:buClrTx/>
-              <a:buSzTx/>
-              <a:buFontTx/>
-              <a:buNone/>
-              <a:tabLst/>
-              <a:defRPr/>
-            </a:pPr>
-            <a:r>
-              <a:rPr lang="en-GB" dirty="0"/>
-              <a:t>&gt; </a:t>
-            </a:r>
-            <a:r>
-              <a:rPr lang="en-GB" dirty="0" err="1"/>
-              <a:t>nrow</a:t>
-            </a:r>
-            <a:r>
-              <a:rPr lang="en-GB" dirty="0"/>
-              <a:t>(</a:t>
-            </a:r>
-            <a:r>
-              <a:rPr lang="en-GB" dirty="0" err="1"/>
-              <a:t>all.CSvP</a:t>
-            </a:r>
-            <a:r>
-              <a:rPr lang="en-GB" dirty="0"/>
-              <a:t>[</a:t>
-            </a:r>
-            <a:r>
-              <a:rPr lang="en-GB" dirty="0" err="1"/>
-              <a:t>all.CSvP$adj.P.Val</a:t>
-            </a:r>
-            <a:r>
-              <a:rPr lang="en-GB" dirty="0"/>
-              <a:t> &lt; 0.05 &amp; </a:t>
-            </a:r>
-            <a:r>
-              <a:rPr lang="en-GB" dirty="0" err="1"/>
-              <a:t>all.CSvP</a:t>
-            </a:r>
-            <a:r>
-              <a:rPr lang="en-GB" dirty="0"/>
-              <a:t> &lt; -0.58 &amp; </a:t>
-            </a:r>
-            <a:r>
-              <a:rPr lang="en-GB" dirty="0" err="1"/>
-              <a:t>all.CS_PvCSxP$adj.P.Val</a:t>
-            </a:r>
-            <a:r>
-              <a:rPr lang="en-GB" dirty="0"/>
-              <a:t> &lt; 0.05 &amp; </a:t>
-            </a:r>
-            <a:r>
-              <a:rPr lang="en-GB" dirty="0" err="1"/>
-              <a:t>all.CS_PvCSxP$logFC</a:t>
-            </a:r>
-            <a:r>
-              <a:rPr lang="en-GB" dirty="0"/>
-              <a:t> &lt; -0.58,])</a:t>
-            </a:r>
-          </a:p>
-          <a:p>
-            <a:pPr marL="0" marR="0" lvl="0" indent="0" algn="l" defTabSz="914400" rtl="0" eaLnBrk="1" fontAlgn="auto" latinLnBrk="0" hangingPunct="1">
-              <a:lnSpc>
-                <a:spcPct val="100000"/>
-              </a:lnSpc>
-              <a:spcBef>
-                <a:spcPts val="0"/>
-              </a:spcBef>
-              <a:spcAft>
-                <a:spcPts val="0"/>
-              </a:spcAft>
-              <a:buClrTx/>
-              <a:buSzTx/>
-              <a:buFontTx/>
-              <a:buNone/>
-              <a:tabLst/>
-              <a:defRPr/>
-            </a:pPr>
-            <a:r>
-              <a:rPr lang="en-GB" dirty="0"/>
-              <a:t>[1] 630</a:t>
-            </a:r>
-          </a:p>
-          <a:p>
-            <a:pPr marL="0" marR="0" lvl="0" indent="0" algn="l" defTabSz="914400" rtl="0" eaLnBrk="1" fontAlgn="auto" latinLnBrk="0" hangingPunct="1">
-              <a:lnSpc>
-                <a:spcPct val="100000"/>
-              </a:lnSpc>
-              <a:spcBef>
-                <a:spcPts val="0"/>
-              </a:spcBef>
-              <a:spcAft>
-                <a:spcPts val="0"/>
-              </a:spcAft>
-              <a:buClrTx/>
-              <a:buSzTx/>
-              <a:buFontTx/>
-              <a:buNone/>
-              <a:tabLst/>
-              <a:defRPr/>
-            </a:pPr>
-            <a:r>
-              <a:rPr lang="en-GB" dirty="0"/>
-              <a:t>&gt; </a:t>
-            </a:r>
-            <a:r>
-              <a:rPr lang="en-GB" dirty="0" err="1"/>
-              <a:t>nrow</a:t>
-            </a:r>
-            <a:r>
-              <a:rPr lang="en-GB" dirty="0"/>
-              <a:t>(</a:t>
-            </a:r>
-            <a:r>
-              <a:rPr lang="en-GB" dirty="0" err="1"/>
-              <a:t>all.CSvP</a:t>
-            </a:r>
-            <a:r>
-              <a:rPr lang="en-GB" dirty="0"/>
-              <a:t>[</a:t>
-            </a:r>
-            <a:r>
-              <a:rPr lang="en-GB" dirty="0" err="1"/>
-              <a:t>all.CSvP$adj.P.Val</a:t>
-            </a:r>
-            <a:r>
-              <a:rPr lang="en-GB" dirty="0"/>
-              <a:t> &lt; 0.05 &amp; </a:t>
-            </a:r>
-            <a:r>
-              <a:rPr lang="en-GB" dirty="0" err="1"/>
-              <a:t>all.CSvP</a:t>
-            </a:r>
-            <a:r>
-              <a:rPr lang="en-GB" dirty="0"/>
-              <a:t> &gt; 0.58,])</a:t>
-            </a:r>
-          </a:p>
-          <a:p>
-            <a:pPr marL="0" marR="0" lvl="0" indent="0" algn="l" defTabSz="914400" rtl="0" eaLnBrk="1" fontAlgn="auto" latinLnBrk="0" hangingPunct="1">
-              <a:lnSpc>
-                <a:spcPct val="100000"/>
-              </a:lnSpc>
-              <a:spcBef>
-                <a:spcPts val="0"/>
-              </a:spcBef>
-              <a:spcAft>
-                <a:spcPts val="0"/>
-              </a:spcAft>
-              <a:buClrTx/>
-              <a:buSzTx/>
-              <a:buFontTx/>
-              <a:buNone/>
-              <a:tabLst/>
-              <a:defRPr/>
-            </a:pPr>
-            <a:r>
-              <a:rPr lang="en-GB" dirty="0"/>
-              <a:t>[1] 7579</a:t>
-            </a:r>
-          </a:p>
-          <a:p>
-            <a:pPr marL="0" marR="0" lvl="0" indent="0" algn="l" defTabSz="914400" rtl="0" eaLnBrk="1" fontAlgn="auto" latinLnBrk="0" hangingPunct="1">
-              <a:lnSpc>
-                <a:spcPct val="100000"/>
-              </a:lnSpc>
-              <a:spcBef>
-                <a:spcPts val="0"/>
-              </a:spcBef>
-              <a:spcAft>
-                <a:spcPts val="0"/>
-              </a:spcAft>
-              <a:buClrTx/>
-              <a:buSzTx/>
-              <a:buFontTx/>
-              <a:buNone/>
-              <a:tabLst/>
-              <a:defRPr/>
-            </a:pPr>
-            <a:r>
-              <a:rPr lang="en-GB" dirty="0"/>
-              <a:t>&gt; </a:t>
-            </a:r>
-            <a:r>
-              <a:rPr lang="en-GB" dirty="0" err="1"/>
-              <a:t>nrow</a:t>
-            </a:r>
-            <a:r>
-              <a:rPr lang="en-GB" dirty="0"/>
-              <a:t>(</a:t>
-            </a:r>
-            <a:r>
-              <a:rPr lang="en-GB" dirty="0" err="1"/>
-              <a:t>all.CSvP</a:t>
-            </a:r>
-            <a:r>
-              <a:rPr lang="en-GB" dirty="0"/>
-              <a:t>[</a:t>
-            </a:r>
-            <a:r>
-              <a:rPr lang="en-GB" dirty="0" err="1"/>
-              <a:t>all.CSvP$adj.P.Val</a:t>
-            </a:r>
-            <a:r>
-              <a:rPr lang="en-GB" dirty="0"/>
-              <a:t> &lt; 0.05 &amp; </a:t>
-            </a:r>
-            <a:r>
-              <a:rPr lang="en-GB" dirty="0" err="1"/>
-              <a:t>all.CSvP</a:t>
-            </a:r>
-            <a:r>
-              <a:rPr lang="en-GB" dirty="0"/>
-              <a:t> &lt; -0.58,])</a:t>
-            </a:r>
-          </a:p>
-          <a:p>
-            <a:pPr marL="0" marR="0" lvl="0" indent="0" algn="l" defTabSz="914400" rtl="0" eaLnBrk="1" fontAlgn="auto" latinLnBrk="0" hangingPunct="1">
-              <a:lnSpc>
-                <a:spcPct val="100000"/>
-              </a:lnSpc>
-              <a:spcBef>
-                <a:spcPts val="0"/>
-              </a:spcBef>
-              <a:spcAft>
-                <a:spcPts val="0"/>
-              </a:spcAft>
-              <a:buClrTx/>
-              <a:buSzTx/>
-              <a:buFontTx/>
-              <a:buNone/>
-              <a:tabLst/>
-              <a:defRPr/>
-            </a:pPr>
-            <a:r>
-              <a:rPr lang="en-GB" dirty="0"/>
-              <a:t>[1] 3027</a:t>
-            </a:r>
-          </a:p>
-          <a:p>
-            <a:pPr marL="0" marR="0" lvl="0" indent="0" algn="l" defTabSz="914400" rtl="0" eaLnBrk="1" fontAlgn="auto" latinLnBrk="0" hangingPunct="1">
-              <a:lnSpc>
-                <a:spcPct val="100000"/>
-              </a:lnSpc>
-              <a:spcBef>
-                <a:spcPts val="0"/>
-              </a:spcBef>
-              <a:spcAft>
-                <a:spcPts val="0"/>
-              </a:spcAft>
-              <a:buClrTx/>
-              <a:buSzTx/>
-              <a:buFontTx/>
-              <a:buNone/>
-              <a:tabLst/>
-              <a:defRPr/>
-            </a:pPr>
-            <a:r>
-              <a:rPr lang="en-GB" dirty="0"/>
-              <a:t>&gt; </a:t>
-            </a:r>
-            <a:r>
-              <a:rPr lang="en-GB" dirty="0" err="1"/>
-              <a:t>nrow</a:t>
-            </a:r>
-            <a:r>
-              <a:rPr lang="en-GB" dirty="0"/>
-              <a:t>(</a:t>
-            </a:r>
-            <a:r>
-              <a:rPr lang="en-GB" dirty="0" err="1"/>
-              <a:t>all.CS_PvCSxP</a:t>
-            </a:r>
-            <a:r>
-              <a:rPr lang="en-GB" dirty="0"/>
-              <a:t>[</a:t>
-            </a:r>
-            <a:r>
-              <a:rPr lang="en-GB" dirty="0" err="1"/>
-              <a:t>all.CS_PvCSxP$adj.P.Val</a:t>
-            </a:r>
-            <a:r>
-              <a:rPr lang="en-GB" dirty="0"/>
-              <a:t> &lt; 0.05 &amp; </a:t>
-            </a:r>
-            <a:r>
-              <a:rPr lang="en-GB" dirty="0" err="1"/>
-              <a:t>all.CS_PvCSxP$logFC</a:t>
-            </a:r>
-            <a:r>
-              <a:rPr lang="en-GB" dirty="0"/>
-              <a:t> &gt; 0.58,])</a:t>
-            </a:r>
-          </a:p>
-          <a:p>
-            <a:pPr marL="0" marR="0" lvl="0" indent="0" algn="l" defTabSz="914400" rtl="0" eaLnBrk="1" fontAlgn="auto" latinLnBrk="0" hangingPunct="1">
-              <a:lnSpc>
-                <a:spcPct val="100000"/>
-              </a:lnSpc>
-              <a:spcBef>
-                <a:spcPts val="0"/>
-              </a:spcBef>
-              <a:spcAft>
-                <a:spcPts val="0"/>
-              </a:spcAft>
-              <a:buClrTx/>
-              <a:buSzTx/>
-              <a:buFontTx/>
-              <a:buNone/>
-              <a:tabLst/>
-              <a:defRPr/>
-            </a:pPr>
-            <a:r>
-              <a:rPr lang="en-GB" dirty="0"/>
-              <a:t>[1] 8045</a:t>
-            </a:r>
-          </a:p>
-          <a:p>
-            <a:pPr marL="0" marR="0" lvl="0" indent="0" algn="l" defTabSz="914400" rtl="0" eaLnBrk="1" fontAlgn="auto" latinLnBrk="0" hangingPunct="1">
-              <a:lnSpc>
-                <a:spcPct val="100000"/>
-              </a:lnSpc>
-              <a:spcBef>
-                <a:spcPts val="0"/>
-              </a:spcBef>
-              <a:spcAft>
-                <a:spcPts val="0"/>
-              </a:spcAft>
-              <a:buClrTx/>
-              <a:buSzTx/>
-              <a:buFontTx/>
-              <a:buNone/>
-              <a:tabLst/>
-              <a:defRPr/>
-            </a:pPr>
-            <a:r>
-              <a:rPr lang="en-GB" dirty="0"/>
-              <a:t>&gt; </a:t>
-            </a:r>
-            <a:r>
-              <a:rPr lang="en-GB" dirty="0" err="1"/>
-              <a:t>nrow</a:t>
-            </a:r>
-            <a:r>
-              <a:rPr lang="en-GB" dirty="0"/>
-              <a:t>(</a:t>
-            </a:r>
-            <a:r>
-              <a:rPr lang="en-GB" dirty="0" err="1"/>
-              <a:t>all.CS_PvCSxP</a:t>
-            </a:r>
-            <a:r>
-              <a:rPr lang="en-GB" dirty="0"/>
-              <a:t>[</a:t>
-            </a:r>
-            <a:r>
-              <a:rPr lang="en-GB" dirty="0" err="1"/>
-              <a:t>all.CS_PvCSxP$adj.P.Val</a:t>
-            </a:r>
-            <a:r>
-              <a:rPr lang="en-GB" dirty="0"/>
-              <a:t> &lt; 0.05 &amp; </a:t>
-            </a:r>
-            <a:r>
-              <a:rPr lang="en-GB" dirty="0" err="1"/>
-              <a:t>all.CS_PvCSxP$logFC</a:t>
-            </a:r>
-            <a:r>
-              <a:rPr lang="en-GB" dirty="0"/>
-              <a:t> &lt; -0.58,])</a:t>
-            </a:r>
-          </a:p>
-          <a:p>
-            <a:pPr marL="0" marR="0" lvl="0" indent="0" algn="l" defTabSz="914400" rtl="0" eaLnBrk="1" fontAlgn="auto" latinLnBrk="0" hangingPunct="1">
-              <a:lnSpc>
-                <a:spcPct val="100000"/>
-              </a:lnSpc>
-              <a:spcBef>
-                <a:spcPts val="0"/>
-              </a:spcBef>
-              <a:spcAft>
-                <a:spcPts val="0"/>
-              </a:spcAft>
-              <a:buClrTx/>
-              <a:buSzTx/>
-              <a:buFontTx/>
-              <a:buNone/>
-              <a:tabLst/>
-              <a:defRPr/>
-            </a:pPr>
-            <a:r>
-              <a:rPr lang="en-GB" dirty="0"/>
-              <a:t>[1] 6568</a:t>
-            </a:r>
-          </a:p>
-          <a:p>
-            <a:pPr marL="0" marR="0" lvl="0" indent="0" algn="l" defTabSz="914400" rtl="0" eaLnBrk="1" fontAlgn="auto" latinLnBrk="0" hangingPunct="1">
-              <a:lnSpc>
-                <a:spcPct val="100000"/>
-              </a:lnSpc>
-              <a:spcBef>
-                <a:spcPts val="0"/>
-              </a:spcBef>
-              <a:spcAft>
-                <a:spcPts val="0"/>
-              </a:spcAft>
-              <a:buClrTx/>
-              <a:buSzTx/>
-              <a:buFontTx/>
-              <a:buNone/>
-              <a:tabLst/>
-              <a:defRPr/>
-            </a:pPr>
-            <a:r>
-              <a:rPr lang="en-GB" dirty="0"/>
-              <a:t>&gt; </a:t>
-            </a:r>
-            <a:r>
-              <a:rPr lang="en-GB" dirty="0" err="1"/>
-              <a:t>nrow</a:t>
-            </a:r>
-            <a:r>
-              <a:rPr lang="en-GB" dirty="0"/>
-              <a:t>(</a:t>
-            </a:r>
-            <a:r>
-              <a:rPr lang="en-GB" dirty="0" err="1"/>
-              <a:t>all.CSvP</a:t>
-            </a:r>
-            <a:r>
-              <a:rPr lang="en-GB" dirty="0"/>
-              <a:t>)</a:t>
-            </a:r>
-          </a:p>
-          <a:p>
-            <a:pPr marL="0" marR="0" lvl="0" indent="0" algn="l" defTabSz="914400" rtl="0" eaLnBrk="1" fontAlgn="auto" latinLnBrk="0" hangingPunct="1">
-              <a:lnSpc>
-                <a:spcPct val="100000"/>
-              </a:lnSpc>
-              <a:spcBef>
-                <a:spcPts val="0"/>
-              </a:spcBef>
-              <a:spcAft>
-                <a:spcPts val="0"/>
-              </a:spcAft>
-              <a:buClrTx/>
-              <a:buSzTx/>
-              <a:buFontTx/>
-              <a:buNone/>
-              <a:tabLst/>
-              <a:defRPr/>
-            </a:pPr>
-            <a:r>
-              <a:rPr lang="en-GB" dirty="0"/>
-              <a:t>[1] 35464</a:t>
-            </a:r>
-          </a:p>
-          <a:p>
-            <a:pPr marL="0" marR="0" lvl="0" indent="0" algn="l" defTabSz="914400" rtl="0" eaLnBrk="1" fontAlgn="auto" latinLnBrk="0" hangingPunct="1">
-              <a:lnSpc>
-                <a:spcPct val="100000"/>
-              </a:lnSpc>
-              <a:spcBef>
-                <a:spcPts val="0"/>
-              </a:spcBef>
-              <a:spcAft>
-                <a:spcPts val="0"/>
-              </a:spcAft>
-              <a:buClrTx/>
-              <a:buSzTx/>
-              <a:buFontTx/>
-              <a:buNone/>
-              <a:tabLst/>
-              <a:defRPr/>
-            </a:pPr>
-            <a:endParaRPr lang="en-DE" dirty="0"/>
-          </a:p>
-          <a:p>
-            <a:endParaRPr lang="en-DE" dirty="0"/>
-          </a:p>
         </p:txBody>
       </p:sp>
       <p:sp>
@@ -1267,7 +533,7 @@
           <a:bodyPr/>
           <a:lstStyle/>
           <a:p>
-            <a:fld id="{BA48473D-6385-394A-B5E2-7D1906D53F94}" type="slidenum">
+            <a:fld id="{9047636C-B006-8E47-A161-B8C06667EDC6}" type="slidenum">
               <a:rPr lang="en-DE" smtClean="0"/>
               <a:t>1</a:t>
             </a:fld>
@@ -1278,7 +544,7 @@
     </p:spTree>
     <p:extLst>
       <p:ext uri="{BB962C8B-B14F-4D97-AF65-F5344CB8AC3E}">
-        <p14:creationId xmlns:p14="http://schemas.microsoft.com/office/powerpoint/2010/main" val="2671893520"/>
+        <p14:creationId xmlns:p14="http://schemas.microsoft.com/office/powerpoint/2010/main" val="3460546954"/>
       </p:ext>
     </p:extLst>
   </p:cSld>
@@ -1317,15 +583,15 @@
         </p:nvSpPr>
         <p:spPr>
           <a:xfrm>
-            <a:off x="260946" y="156144"/>
-            <a:ext cx="1565672" cy="332164"/>
+            <a:off x="206971" y="150168"/>
+            <a:ext cx="1241822" cy="319452"/>
           </a:xfrm>
         </p:spPr>
         <p:txBody>
           <a:bodyPr anchor="b"/>
           <a:lstStyle>
             <a:lvl1pPr algn="ctr">
-              <a:defRPr sz="835"/>
+              <a:defRPr sz="803"/>
             </a:lvl1pPr>
           </a:lstStyle>
           <a:p>
@@ -1349,8 +615,8 @@
         </p:nvSpPr>
         <p:spPr>
           <a:xfrm>
-            <a:off x="260946" y="501117"/>
-            <a:ext cx="1565672" cy="230350"/>
+            <a:off x="206971" y="481939"/>
+            <a:ext cx="1241822" cy="221535"/>
           </a:xfrm>
         </p:spPr>
         <p:txBody>
@@ -1358,39 +624,39 @@
           <a:lstStyle>
             <a:lvl1pPr marL="0" indent="0" algn="ctr">
               <a:buNone/>
-              <a:defRPr sz="334"/>
+              <a:defRPr sz="321"/>
             </a:lvl1pPr>
-            <a:lvl2pPr marL="63597" indent="0" algn="ctr">
-              <a:buNone/>
-              <a:defRPr sz="278"/>
+            <a:lvl2pPr marL="61173" indent="0" algn="ctr">
+              <a:buNone/>
+              <a:defRPr sz="268"/>
             </a:lvl2pPr>
-            <a:lvl3pPr marL="127193" indent="0" algn="ctr">
-              <a:buNone/>
-              <a:defRPr sz="250"/>
+            <a:lvl3pPr marL="122347" indent="0" algn="ctr">
+              <a:buNone/>
+              <a:defRPr sz="241"/>
             </a:lvl3pPr>
-            <a:lvl4pPr marL="190790" indent="0" algn="ctr">
-              <a:buNone/>
-              <a:defRPr sz="223"/>
+            <a:lvl4pPr marL="183520" indent="0" algn="ctr">
+              <a:buNone/>
+              <a:defRPr sz="214"/>
             </a:lvl4pPr>
-            <a:lvl5pPr marL="254386" indent="0" algn="ctr">
-              <a:buNone/>
-              <a:defRPr sz="223"/>
+            <a:lvl5pPr marL="244693" indent="0" algn="ctr">
+              <a:buNone/>
+              <a:defRPr sz="214"/>
             </a:lvl5pPr>
-            <a:lvl6pPr marL="317983" indent="0" algn="ctr">
-              <a:buNone/>
-              <a:defRPr sz="223"/>
+            <a:lvl6pPr marL="305867" indent="0" algn="ctr">
+              <a:buNone/>
+              <a:defRPr sz="214"/>
             </a:lvl6pPr>
-            <a:lvl7pPr marL="381579" indent="0" algn="ctr">
-              <a:buNone/>
-              <a:defRPr sz="223"/>
+            <a:lvl7pPr marL="367040" indent="0" algn="ctr">
+              <a:buNone/>
+              <a:defRPr sz="214"/>
             </a:lvl7pPr>
-            <a:lvl8pPr marL="445176" indent="0" algn="ctr">
-              <a:buNone/>
-              <a:defRPr sz="223"/>
+            <a:lvl8pPr marL="428214" indent="0" algn="ctr">
+              <a:buNone/>
+              <a:defRPr sz="214"/>
             </a:lvl8pPr>
-            <a:lvl9pPr marL="508772" indent="0" algn="ctr">
-              <a:buNone/>
-              <a:defRPr sz="223"/>
+            <a:lvl9pPr marL="489387" indent="0" algn="ctr">
+              <a:buNone/>
+              <a:defRPr sz="214"/>
             </a:lvl9pPr>
           </a:lstStyle>
           <a:p>
@@ -1419,7 +685,7 @@
           <a:p>
             <a:fld id="{CF9FBDB8-36C6-4744-999D-C99C2C96D370}" type="datetimeFigureOut">
               <a:rPr lang="en-DE" smtClean="0"/>
-              <a:t>13.05.26</a:t>
+              <a:t>15.05.26</a:t>
             </a:fld>
             <a:endParaRPr lang="en-DE"/>
           </a:p>
@@ -1470,7 +736,7 @@
     </p:spTree>
     <p:extLst>
       <p:ext uri="{BB962C8B-B14F-4D97-AF65-F5344CB8AC3E}">
-        <p14:creationId xmlns:p14="http://schemas.microsoft.com/office/powerpoint/2010/main" val="1107837754"/>
+        <p14:creationId xmlns:p14="http://schemas.microsoft.com/office/powerpoint/2010/main" val="694085185"/>
       </p:ext>
     </p:extLst>
   </p:cSld>
@@ -1589,7 +855,7 @@
           <a:p>
             <a:fld id="{CF9FBDB8-36C6-4744-999D-C99C2C96D370}" type="datetimeFigureOut">
               <a:rPr lang="en-DE" smtClean="0"/>
-              <a:t>13.05.26</a:t>
+              <a:t>15.05.26</a:t>
             </a:fld>
             <a:endParaRPr lang="en-DE"/>
           </a:p>
@@ -1640,7 +906,7 @@
     </p:spTree>
     <p:extLst>
       <p:ext uri="{BB962C8B-B14F-4D97-AF65-F5344CB8AC3E}">
-        <p14:creationId xmlns:p14="http://schemas.microsoft.com/office/powerpoint/2010/main" val="3732157331"/>
+        <p14:creationId xmlns:p14="http://schemas.microsoft.com/office/powerpoint/2010/main" val="2309272410"/>
       </p:ext>
     </p:extLst>
   </p:cSld>
@@ -1679,8 +945,8 @@
         </p:nvSpPr>
         <p:spPr>
           <a:xfrm>
-            <a:off x="1493912" y="50797"/>
-            <a:ext cx="450131" cy="808545"/>
+            <a:off x="1184905" y="48853"/>
+            <a:ext cx="357024" cy="777602"/>
           </a:xfrm>
         </p:spPr>
         <p:txBody>
@@ -1707,8 +973,8 @@
         </p:nvSpPr>
         <p:spPr>
           <a:xfrm>
-            <a:off x="143520" y="50797"/>
-            <a:ext cx="1324298" cy="808545"/>
+            <a:off x="113834" y="48853"/>
+            <a:ext cx="1050375" cy="777602"/>
           </a:xfrm>
         </p:spPr>
         <p:txBody>
@@ -1769,7 +1035,7 @@
           <a:p>
             <a:fld id="{CF9FBDB8-36C6-4744-999D-C99C2C96D370}" type="datetimeFigureOut">
               <a:rPr lang="en-DE" smtClean="0"/>
-              <a:t>13.05.26</a:t>
+              <a:t>15.05.26</a:t>
             </a:fld>
             <a:endParaRPr lang="en-DE"/>
           </a:p>
@@ -1820,7 +1086,7 @@
     </p:spTree>
     <p:extLst>
       <p:ext uri="{BB962C8B-B14F-4D97-AF65-F5344CB8AC3E}">
-        <p14:creationId xmlns:p14="http://schemas.microsoft.com/office/powerpoint/2010/main" val="413462703"/>
+        <p14:creationId xmlns:p14="http://schemas.microsoft.com/office/powerpoint/2010/main" val="372531619"/>
       </p:ext>
     </p:extLst>
   </p:cSld>
@@ -1939,7 +1205,7 @@
           <a:p>
             <a:fld id="{CF9FBDB8-36C6-4744-999D-C99C2C96D370}" type="datetimeFigureOut">
               <a:rPr lang="en-DE" smtClean="0"/>
-              <a:t>13.05.26</a:t>
+              <a:t>15.05.26</a:t>
             </a:fld>
             <a:endParaRPr lang="en-DE"/>
           </a:p>
@@ -1990,7 +1256,7 @@
     </p:spTree>
     <p:extLst>
       <p:ext uri="{BB962C8B-B14F-4D97-AF65-F5344CB8AC3E}">
-        <p14:creationId xmlns:p14="http://schemas.microsoft.com/office/powerpoint/2010/main" val="510120847"/>
+        <p14:creationId xmlns:p14="http://schemas.microsoft.com/office/powerpoint/2010/main" val="1243467602"/>
       </p:ext>
     </p:extLst>
   </p:cSld>
@@ -2029,15 +1295,15 @@
         </p:nvSpPr>
         <p:spPr>
           <a:xfrm>
-            <a:off x="142433" y="237860"/>
-            <a:ext cx="1800523" cy="396874"/>
+            <a:off x="112971" y="228757"/>
+            <a:ext cx="1428096" cy="381686"/>
           </a:xfrm>
         </p:spPr>
         <p:txBody>
           <a:bodyPr anchor="b"/>
           <a:lstStyle>
             <a:lvl1pPr>
-              <a:defRPr sz="835"/>
+              <a:defRPr sz="803"/>
             </a:lvl1pPr>
           </a:lstStyle>
           <a:p>
@@ -2061,8 +1327,8 @@
         </p:nvSpPr>
         <p:spPr>
           <a:xfrm>
-            <a:off x="142433" y="638488"/>
-            <a:ext cx="1800523" cy="208707"/>
+            <a:off x="112971" y="614053"/>
+            <a:ext cx="1428096" cy="200719"/>
           </a:xfrm>
         </p:spPr>
         <p:txBody>
@@ -2070,7 +1336,7 @@
           <a:lstStyle>
             <a:lvl1pPr marL="0" indent="0">
               <a:buNone/>
-              <a:defRPr sz="334">
+              <a:defRPr sz="321">
                 <a:solidFill>
                   <a:schemeClr val="tx1">
                     <a:tint val="82000"/>
@@ -2078,9 +1344,9 @@
                 </a:solidFill>
               </a:defRPr>
             </a:lvl1pPr>
-            <a:lvl2pPr marL="63597" indent="0">
-              <a:buNone/>
-              <a:defRPr sz="278">
+            <a:lvl2pPr marL="61173" indent="0">
+              <a:buNone/>
+              <a:defRPr sz="268">
                 <a:solidFill>
                   <a:schemeClr val="tx1">
                     <a:tint val="82000"/>
@@ -2088,9 +1354,9 @@
                 </a:solidFill>
               </a:defRPr>
             </a:lvl2pPr>
-            <a:lvl3pPr marL="127193" indent="0">
-              <a:buNone/>
-              <a:defRPr sz="250">
+            <a:lvl3pPr marL="122347" indent="0">
+              <a:buNone/>
+              <a:defRPr sz="241">
                 <a:solidFill>
                   <a:schemeClr val="tx1">
                     <a:tint val="82000"/>
@@ -2098,9 +1364,9 @@
                 </a:solidFill>
               </a:defRPr>
             </a:lvl3pPr>
-            <a:lvl4pPr marL="190790" indent="0">
-              <a:buNone/>
-              <a:defRPr sz="223">
+            <a:lvl4pPr marL="183520" indent="0">
+              <a:buNone/>
+              <a:defRPr sz="214">
                 <a:solidFill>
                   <a:schemeClr val="tx1">
                     <a:tint val="82000"/>
@@ -2108,9 +1374,9 @@
                 </a:solidFill>
               </a:defRPr>
             </a:lvl4pPr>
-            <a:lvl5pPr marL="254386" indent="0">
-              <a:buNone/>
-              <a:defRPr sz="223">
+            <a:lvl5pPr marL="244693" indent="0">
+              <a:buNone/>
+              <a:defRPr sz="214">
                 <a:solidFill>
                   <a:schemeClr val="tx1">
                     <a:tint val="82000"/>
@@ -2118,9 +1384,9 @@
                 </a:solidFill>
               </a:defRPr>
             </a:lvl5pPr>
-            <a:lvl6pPr marL="317983" indent="0">
-              <a:buNone/>
-              <a:defRPr sz="223">
+            <a:lvl6pPr marL="305867" indent="0">
+              <a:buNone/>
+              <a:defRPr sz="214">
                 <a:solidFill>
                   <a:schemeClr val="tx1">
                     <a:tint val="82000"/>
@@ -2128,9 +1394,9 @@
                 </a:solidFill>
               </a:defRPr>
             </a:lvl6pPr>
-            <a:lvl7pPr marL="381579" indent="0">
-              <a:buNone/>
-              <a:defRPr sz="223">
+            <a:lvl7pPr marL="367040" indent="0">
+              <a:buNone/>
+              <a:defRPr sz="214">
                 <a:solidFill>
                   <a:schemeClr val="tx1">
                     <a:tint val="82000"/>
@@ -2138,9 +1404,9 @@
                 </a:solidFill>
               </a:defRPr>
             </a:lvl7pPr>
-            <a:lvl8pPr marL="445176" indent="0">
-              <a:buNone/>
-              <a:defRPr sz="223">
+            <a:lvl8pPr marL="428214" indent="0">
+              <a:buNone/>
+              <a:defRPr sz="214">
                 <a:solidFill>
                   <a:schemeClr val="tx1">
                     <a:tint val="82000"/>
@@ -2148,9 +1414,9 @@
                 </a:solidFill>
               </a:defRPr>
             </a:lvl8pPr>
-            <a:lvl9pPr marL="508772" indent="0">
-              <a:buNone/>
-              <a:defRPr sz="223">
+            <a:lvl9pPr marL="489387" indent="0">
+              <a:buNone/>
+              <a:defRPr sz="214">
                 <a:solidFill>
                   <a:schemeClr val="tx1">
                     <a:tint val="82000"/>
@@ -2185,7 +1451,7 @@
           <a:p>
             <a:fld id="{CF9FBDB8-36C6-4744-999D-C99C2C96D370}" type="datetimeFigureOut">
               <a:rPr lang="en-DE" smtClean="0"/>
-              <a:t>13.05.26</a:t>
+              <a:t>15.05.26</a:t>
             </a:fld>
             <a:endParaRPr lang="en-DE"/>
           </a:p>
@@ -2236,7 +1502,7 @@
     </p:spTree>
     <p:extLst>
       <p:ext uri="{BB962C8B-B14F-4D97-AF65-F5344CB8AC3E}">
-        <p14:creationId xmlns:p14="http://schemas.microsoft.com/office/powerpoint/2010/main" val="1853031205"/>
+        <p14:creationId xmlns:p14="http://schemas.microsoft.com/office/powerpoint/2010/main" val="831898842"/>
       </p:ext>
     </p:extLst>
   </p:cSld>
@@ -2298,8 +1564,8 @@
         </p:nvSpPr>
         <p:spPr>
           <a:xfrm>
-            <a:off x="143520" y="253982"/>
-            <a:ext cx="887214" cy="605360"/>
+            <a:off x="113834" y="244262"/>
+            <a:ext cx="703699" cy="582193"/>
           </a:xfrm>
         </p:spPr>
         <p:txBody>
@@ -2355,8 +1621,8 @@
         </p:nvSpPr>
         <p:spPr>
           <a:xfrm>
-            <a:off x="1056829" y="253982"/>
-            <a:ext cx="887214" cy="605360"/>
+            <a:off x="838230" y="244262"/>
+            <a:ext cx="703699" cy="582193"/>
           </a:xfrm>
         </p:spPr>
         <p:txBody>
@@ -2417,7 +1683,7 @@
           <a:p>
             <a:fld id="{CF9FBDB8-36C6-4744-999D-C99C2C96D370}" type="datetimeFigureOut">
               <a:rPr lang="en-DE" smtClean="0"/>
-              <a:t>13.05.26</a:t>
+              <a:t>15.05.26</a:t>
             </a:fld>
             <a:endParaRPr lang="en-DE"/>
           </a:p>
@@ -2468,7 +1734,7 @@
     </p:spTree>
     <p:extLst>
       <p:ext uri="{BB962C8B-B14F-4D97-AF65-F5344CB8AC3E}">
-        <p14:creationId xmlns:p14="http://schemas.microsoft.com/office/powerpoint/2010/main" val="991184807"/>
+        <p14:creationId xmlns:p14="http://schemas.microsoft.com/office/powerpoint/2010/main" val="3151819770"/>
       </p:ext>
     </p:extLst>
   </p:cSld>
@@ -2507,8 +1773,8 @@
         </p:nvSpPr>
         <p:spPr>
           <a:xfrm>
-            <a:off x="143792" y="50796"/>
-            <a:ext cx="1800523" cy="184413"/>
+            <a:off x="114049" y="48853"/>
+            <a:ext cx="1428096" cy="177355"/>
           </a:xfrm>
         </p:spPr>
         <p:txBody>
@@ -2535,8 +1801,8 @@
         </p:nvSpPr>
         <p:spPr>
           <a:xfrm>
-            <a:off x="143792" y="233884"/>
-            <a:ext cx="883137" cy="114623"/>
+            <a:off x="114050" y="224934"/>
+            <a:ext cx="700465" cy="110236"/>
           </a:xfrm>
         </p:spPr>
         <p:txBody>
@@ -2544,39 +1810,39 @@
           <a:lstStyle>
             <a:lvl1pPr marL="0" indent="0">
               <a:buNone/>
-              <a:defRPr sz="334" b="1"/>
+              <a:defRPr sz="321" b="1"/>
             </a:lvl1pPr>
-            <a:lvl2pPr marL="63597" indent="0">
-              <a:buNone/>
-              <a:defRPr sz="278" b="1"/>
+            <a:lvl2pPr marL="61173" indent="0">
+              <a:buNone/>
+              <a:defRPr sz="268" b="1"/>
             </a:lvl2pPr>
-            <a:lvl3pPr marL="127193" indent="0">
-              <a:buNone/>
-              <a:defRPr sz="250" b="1"/>
+            <a:lvl3pPr marL="122347" indent="0">
+              <a:buNone/>
+              <a:defRPr sz="241" b="1"/>
             </a:lvl3pPr>
-            <a:lvl4pPr marL="190790" indent="0">
-              <a:buNone/>
-              <a:defRPr sz="223" b="1"/>
+            <a:lvl4pPr marL="183520" indent="0">
+              <a:buNone/>
+              <a:defRPr sz="214" b="1"/>
             </a:lvl4pPr>
-            <a:lvl5pPr marL="254386" indent="0">
-              <a:buNone/>
-              <a:defRPr sz="223" b="1"/>
+            <a:lvl5pPr marL="244693" indent="0">
+              <a:buNone/>
+              <a:defRPr sz="214" b="1"/>
             </a:lvl5pPr>
-            <a:lvl6pPr marL="317983" indent="0">
-              <a:buNone/>
-              <a:defRPr sz="223" b="1"/>
+            <a:lvl6pPr marL="305867" indent="0">
+              <a:buNone/>
+              <a:defRPr sz="214" b="1"/>
             </a:lvl6pPr>
-            <a:lvl7pPr marL="381579" indent="0">
-              <a:buNone/>
-              <a:defRPr sz="223" b="1"/>
+            <a:lvl7pPr marL="367040" indent="0">
+              <a:buNone/>
+              <a:defRPr sz="214" b="1"/>
             </a:lvl7pPr>
-            <a:lvl8pPr marL="445176" indent="0">
-              <a:buNone/>
-              <a:defRPr sz="223" b="1"/>
+            <a:lvl8pPr marL="428214" indent="0">
+              <a:buNone/>
+              <a:defRPr sz="214" b="1"/>
             </a:lvl8pPr>
-            <a:lvl9pPr marL="508772" indent="0">
-              <a:buNone/>
-              <a:defRPr sz="223" b="1"/>
+            <a:lvl9pPr marL="489387" indent="0">
+              <a:buNone/>
+              <a:defRPr sz="214" b="1"/>
             </a:lvl9pPr>
           </a:lstStyle>
           <a:p>
@@ -2600,8 +1866,8 @@
         </p:nvSpPr>
         <p:spPr>
           <a:xfrm>
-            <a:off x="143792" y="348507"/>
-            <a:ext cx="883137" cy="512602"/>
+            <a:off x="114050" y="335170"/>
+            <a:ext cx="700465" cy="492984"/>
           </a:xfrm>
         </p:spPr>
         <p:txBody>
@@ -2657,8 +1923,8 @@
         </p:nvSpPr>
         <p:spPr>
           <a:xfrm>
-            <a:off x="1056829" y="233884"/>
-            <a:ext cx="887486" cy="114623"/>
+            <a:off x="838230" y="224934"/>
+            <a:ext cx="703915" cy="110236"/>
           </a:xfrm>
         </p:spPr>
         <p:txBody>
@@ -2666,39 +1932,39 @@
           <a:lstStyle>
             <a:lvl1pPr marL="0" indent="0">
               <a:buNone/>
-              <a:defRPr sz="334" b="1"/>
+              <a:defRPr sz="321" b="1"/>
             </a:lvl1pPr>
-            <a:lvl2pPr marL="63597" indent="0">
-              <a:buNone/>
-              <a:defRPr sz="278" b="1"/>
+            <a:lvl2pPr marL="61173" indent="0">
+              <a:buNone/>
+              <a:defRPr sz="268" b="1"/>
             </a:lvl2pPr>
-            <a:lvl3pPr marL="127193" indent="0">
-              <a:buNone/>
-              <a:defRPr sz="250" b="1"/>
+            <a:lvl3pPr marL="122347" indent="0">
+              <a:buNone/>
+              <a:defRPr sz="241" b="1"/>
             </a:lvl3pPr>
-            <a:lvl4pPr marL="190790" indent="0">
-              <a:buNone/>
-              <a:defRPr sz="223" b="1"/>
+            <a:lvl4pPr marL="183520" indent="0">
+              <a:buNone/>
+              <a:defRPr sz="214" b="1"/>
             </a:lvl4pPr>
-            <a:lvl5pPr marL="254386" indent="0">
-              <a:buNone/>
-              <a:defRPr sz="223" b="1"/>
+            <a:lvl5pPr marL="244693" indent="0">
+              <a:buNone/>
+              <a:defRPr sz="214" b="1"/>
             </a:lvl5pPr>
-            <a:lvl6pPr marL="317983" indent="0">
-              <a:buNone/>
-              <a:defRPr sz="223" b="1"/>
+            <a:lvl6pPr marL="305867" indent="0">
+              <a:buNone/>
+              <a:defRPr sz="214" b="1"/>
             </a:lvl6pPr>
-            <a:lvl7pPr marL="381579" indent="0">
-              <a:buNone/>
-              <a:defRPr sz="223" b="1"/>
+            <a:lvl7pPr marL="367040" indent="0">
+              <a:buNone/>
+              <a:defRPr sz="214" b="1"/>
             </a:lvl7pPr>
-            <a:lvl8pPr marL="445176" indent="0">
-              <a:buNone/>
-              <a:defRPr sz="223" b="1"/>
+            <a:lvl8pPr marL="428214" indent="0">
+              <a:buNone/>
+              <a:defRPr sz="214" b="1"/>
             </a:lvl8pPr>
-            <a:lvl9pPr marL="508772" indent="0">
-              <a:buNone/>
-              <a:defRPr sz="223" b="1"/>
+            <a:lvl9pPr marL="489387" indent="0">
+              <a:buNone/>
+              <a:defRPr sz="214" b="1"/>
             </a:lvl9pPr>
           </a:lstStyle>
           <a:p>
@@ -2722,8 +1988,8 @@
         </p:nvSpPr>
         <p:spPr>
           <a:xfrm>
-            <a:off x="1056829" y="348507"/>
-            <a:ext cx="887486" cy="512602"/>
+            <a:off x="838230" y="335170"/>
+            <a:ext cx="703915" cy="492984"/>
           </a:xfrm>
         </p:spPr>
         <p:txBody>
@@ -2784,7 +2050,7 @@
           <a:p>
             <a:fld id="{CF9FBDB8-36C6-4744-999D-C99C2C96D370}" type="datetimeFigureOut">
               <a:rPr lang="en-DE" smtClean="0"/>
-              <a:t>13.05.26</a:t>
+              <a:t>15.05.26</a:t>
             </a:fld>
             <a:endParaRPr lang="en-DE"/>
           </a:p>
@@ -2835,7 +2101,7 @@
     </p:spTree>
     <p:extLst>
       <p:ext uri="{BB962C8B-B14F-4D97-AF65-F5344CB8AC3E}">
-        <p14:creationId xmlns:p14="http://schemas.microsoft.com/office/powerpoint/2010/main" val="1383739586"/>
+        <p14:creationId xmlns:p14="http://schemas.microsoft.com/office/powerpoint/2010/main" val="1576902859"/>
       </p:ext>
     </p:extLst>
   </p:cSld>
@@ -2902,7 +2168,7 @@
           <a:p>
             <a:fld id="{CF9FBDB8-36C6-4744-999D-C99C2C96D370}" type="datetimeFigureOut">
               <a:rPr lang="en-DE" smtClean="0"/>
-              <a:t>13.05.26</a:t>
+              <a:t>15.05.26</a:t>
             </a:fld>
             <a:endParaRPr lang="en-DE"/>
           </a:p>
@@ -2953,7 +2219,7 @@
     </p:spTree>
     <p:extLst>
       <p:ext uri="{BB962C8B-B14F-4D97-AF65-F5344CB8AC3E}">
-        <p14:creationId xmlns:p14="http://schemas.microsoft.com/office/powerpoint/2010/main" val="2820483171"/>
+        <p14:creationId xmlns:p14="http://schemas.microsoft.com/office/powerpoint/2010/main" val="865242492"/>
       </p:ext>
     </p:extLst>
   </p:cSld>
@@ -2997,7 +2263,7 @@
           <a:p>
             <a:fld id="{CF9FBDB8-36C6-4744-999D-C99C2C96D370}" type="datetimeFigureOut">
               <a:rPr lang="en-DE" smtClean="0"/>
-              <a:t>13.05.26</a:t>
+              <a:t>15.05.26</a:t>
             </a:fld>
             <a:endParaRPr lang="en-DE"/>
           </a:p>
@@ -3048,7 +2314,7 @@
     </p:spTree>
     <p:extLst>
       <p:ext uri="{BB962C8B-B14F-4D97-AF65-F5344CB8AC3E}">
-        <p14:creationId xmlns:p14="http://schemas.microsoft.com/office/powerpoint/2010/main" val="4093507712"/>
+        <p14:creationId xmlns:p14="http://schemas.microsoft.com/office/powerpoint/2010/main" val="367708032"/>
       </p:ext>
     </p:extLst>
   </p:cSld>
@@ -3087,15 +2353,15 @@
         </p:nvSpPr>
         <p:spPr>
           <a:xfrm>
-            <a:off x="143792" y="63606"/>
-            <a:ext cx="673293" cy="222621"/>
+            <a:off x="114049" y="61172"/>
+            <a:ext cx="534027" cy="214101"/>
           </a:xfrm>
         </p:spPr>
         <p:txBody>
           <a:bodyPr anchor="b"/>
           <a:lstStyle>
             <a:lvl1pPr>
-              <a:defRPr sz="445"/>
+              <a:defRPr sz="428"/>
             </a:lvl1pPr>
           </a:lstStyle>
           <a:p>
@@ -3119,39 +2385,39 @@
         </p:nvSpPr>
         <p:spPr>
           <a:xfrm>
-            <a:off x="887486" y="137371"/>
-            <a:ext cx="1056829" cy="678021"/>
+            <a:off x="703915" y="132114"/>
+            <a:ext cx="838230" cy="652073"/>
           </a:xfrm>
         </p:spPr>
         <p:txBody>
           <a:bodyPr/>
           <a:lstStyle>
             <a:lvl1pPr>
-              <a:defRPr sz="445"/>
+              <a:defRPr sz="428"/>
             </a:lvl1pPr>
             <a:lvl2pPr>
-              <a:defRPr sz="389"/>
+              <a:defRPr sz="375"/>
             </a:lvl2pPr>
             <a:lvl3pPr>
-              <a:defRPr sz="334"/>
+              <a:defRPr sz="321"/>
             </a:lvl3pPr>
             <a:lvl4pPr>
-              <a:defRPr sz="278"/>
+              <a:defRPr sz="268"/>
             </a:lvl4pPr>
             <a:lvl5pPr>
-              <a:defRPr sz="278"/>
+              <a:defRPr sz="268"/>
             </a:lvl5pPr>
             <a:lvl6pPr>
-              <a:defRPr sz="278"/>
+              <a:defRPr sz="268"/>
             </a:lvl6pPr>
             <a:lvl7pPr>
-              <a:defRPr sz="278"/>
+              <a:defRPr sz="268"/>
             </a:lvl7pPr>
             <a:lvl8pPr>
-              <a:defRPr sz="278"/>
+              <a:defRPr sz="268"/>
             </a:lvl8pPr>
             <a:lvl9pPr>
-              <a:defRPr sz="278"/>
+              <a:defRPr sz="268"/>
             </a:lvl9pPr>
           </a:lstStyle>
           <a:p>
@@ -3204,8 +2470,8 @@
         </p:nvSpPr>
         <p:spPr>
           <a:xfrm>
-            <a:off x="143792" y="286226"/>
-            <a:ext cx="673293" cy="530270"/>
+            <a:off x="114049" y="275273"/>
+            <a:ext cx="534027" cy="509976"/>
           </a:xfrm>
         </p:spPr>
         <p:txBody>
@@ -3213,39 +2479,39 @@
           <a:lstStyle>
             <a:lvl1pPr marL="0" indent="0">
               <a:buNone/>
-              <a:defRPr sz="223"/>
+              <a:defRPr sz="214"/>
             </a:lvl1pPr>
-            <a:lvl2pPr marL="63597" indent="0">
-              <a:buNone/>
-              <a:defRPr sz="195"/>
+            <a:lvl2pPr marL="61173" indent="0">
+              <a:buNone/>
+              <a:defRPr sz="187"/>
             </a:lvl2pPr>
-            <a:lvl3pPr marL="127193" indent="0">
-              <a:buNone/>
-              <a:defRPr sz="167"/>
+            <a:lvl3pPr marL="122347" indent="0">
+              <a:buNone/>
+              <a:defRPr sz="161"/>
             </a:lvl3pPr>
-            <a:lvl4pPr marL="190790" indent="0">
-              <a:buNone/>
-              <a:defRPr sz="139"/>
+            <a:lvl4pPr marL="183520" indent="0">
+              <a:buNone/>
+              <a:defRPr sz="134"/>
             </a:lvl4pPr>
-            <a:lvl5pPr marL="254386" indent="0">
-              <a:buNone/>
-              <a:defRPr sz="139"/>
+            <a:lvl5pPr marL="244693" indent="0">
+              <a:buNone/>
+              <a:defRPr sz="134"/>
             </a:lvl5pPr>
-            <a:lvl6pPr marL="317983" indent="0">
-              <a:buNone/>
-              <a:defRPr sz="139"/>
+            <a:lvl6pPr marL="305867" indent="0">
+              <a:buNone/>
+              <a:defRPr sz="134"/>
             </a:lvl6pPr>
-            <a:lvl7pPr marL="381579" indent="0">
-              <a:buNone/>
-              <a:defRPr sz="139"/>
+            <a:lvl7pPr marL="367040" indent="0">
+              <a:buNone/>
+              <a:defRPr sz="134"/>
             </a:lvl7pPr>
-            <a:lvl8pPr marL="445176" indent="0">
-              <a:buNone/>
-              <a:defRPr sz="139"/>
+            <a:lvl8pPr marL="428214" indent="0">
+              <a:buNone/>
+              <a:defRPr sz="134"/>
             </a:lvl8pPr>
-            <a:lvl9pPr marL="508772" indent="0">
-              <a:buNone/>
-              <a:defRPr sz="139"/>
+            <a:lvl9pPr marL="489387" indent="0">
+              <a:buNone/>
+              <a:defRPr sz="134"/>
             </a:lvl9pPr>
           </a:lstStyle>
           <a:p>
@@ -3274,7 +2540,7 @@
           <a:p>
             <a:fld id="{CF9FBDB8-36C6-4744-999D-C99C2C96D370}" type="datetimeFigureOut">
               <a:rPr lang="en-DE" smtClean="0"/>
-              <a:t>13.05.26</a:t>
+              <a:t>15.05.26</a:t>
             </a:fld>
             <a:endParaRPr lang="en-DE"/>
           </a:p>
@@ -3325,7 +2591,7 @@
     </p:spTree>
     <p:extLst>
       <p:ext uri="{BB962C8B-B14F-4D97-AF65-F5344CB8AC3E}">
-        <p14:creationId xmlns:p14="http://schemas.microsoft.com/office/powerpoint/2010/main" val="61300477"/>
+        <p14:creationId xmlns:p14="http://schemas.microsoft.com/office/powerpoint/2010/main" val="1089419732"/>
       </p:ext>
     </p:extLst>
   </p:cSld>
@@ -3364,15 +2630,15 @@
         </p:nvSpPr>
         <p:spPr>
           <a:xfrm>
-            <a:off x="143792" y="63606"/>
-            <a:ext cx="673293" cy="222621"/>
+            <a:off x="114049" y="61172"/>
+            <a:ext cx="534027" cy="214101"/>
           </a:xfrm>
         </p:spPr>
         <p:txBody>
           <a:bodyPr anchor="b"/>
           <a:lstStyle>
             <a:lvl1pPr>
-              <a:defRPr sz="445"/>
+              <a:defRPr sz="428"/>
             </a:lvl1pPr>
           </a:lstStyle>
           <a:p>
@@ -3396,8 +2662,8 @@
         </p:nvSpPr>
         <p:spPr>
           <a:xfrm>
-            <a:off x="887486" y="137371"/>
-            <a:ext cx="1056829" cy="678021"/>
+            <a:off x="703915" y="132114"/>
+            <a:ext cx="838230" cy="652073"/>
           </a:xfrm>
         </p:spPr>
         <p:txBody>
@@ -3405,39 +2671,39 @@
           <a:lstStyle>
             <a:lvl1pPr marL="0" indent="0">
               <a:buNone/>
-              <a:defRPr sz="445"/>
+              <a:defRPr sz="428"/>
             </a:lvl1pPr>
-            <a:lvl2pPr marL="63597" indent="0">
-              <a:buNone/>
-              <a:defRPr sz="389"/>
+            <a:lvl2pPr marL="61173" indent="0">
+              <a:buNone/>
+              <a:defRPr sz="375"/>
             </a:lvl2pPr>
-            <a:lvl3pPr marL="127193" indent="0">
-              <a:buNone/>
-              <a:defRPr sz="334"/>
+            <a:lvl3pPr marL="122347" indent="0">
+              <a:buNone/>
+              <a:defRPr sz="321"/>
             </a:lvl3pPr>
-            <a:lvl4pPr marL="190790" indent="0">
-              <a:buNone/>
-              <a:defRPr sz="278"/>
+            <a:lvl4pPr marL="183520" indent="0">
+              <a:buNone/>
+              <a:defRPr sz="268"/>
             </a:lvl4pPr>
-            <a:lvl5pPr marL="254386" indent="0">
-              <a:buNone/>
-              <a:defRPr sz="278"/>
+            <a:lvl5pPr marL="244693" indent="0">
+              <a:buNone/>
+              <a:defRPr sz="268"/>
             </a:lvl5pPr>
-            <a:lvl6pPr marL="317983" indent="0">
-              <a:buNone/>
-              <a:defRPr sz="278"/>
+            <a:lvl6pPr marL="305867" indent="0">
+              <a:buNone/>
+              <a:defRPr sz="268"/>
             </a:lvl6pPr>
-            <a:lvl7pPr marL="381579" indent="0">
-              <a:buNone/>
-              <a:defRPr sz="278"/>
+            <a:lvl7pPr marL="367040" indent="0">
+              <a:buNone/>
+              <a:defRPr sz="268"/>
             </a:lvl7pPr>
-            <a:lvl8pPr marL="445176" indent="0">
-              <a:buNone/>
-              <a:defRPr sz="278"/>
+            <a:lvl8pPr marL="428214" indent="0">
+              <a:buNone/>
+              <a:defRPr sz="268"/>
             </a:lvl8pPr>
-            <a:lvl9pPr marL="508772" indent="0">
-              <a:buNone/>
-              <a:defRPr sz="278"/>
+            <a:lvl9pPr marL="489387" indent="0">
+              <a:buNone/>
+              <a:defRPr sz="268"/>
             </a:lvl9pPr>
           </a:lstStyle>
           <a:p>
@@ -3461,8 +2727,8 @@
         </p:nvSpPr>
         <p:spPr>
           <a:xfrm>
-            <a:off x="143792" y="286226"/>
-            <a:ext cx="673293" cy="530270"/>
+            <a:off x="114049" y="275273"/>
+            <a:ext cx="534027" cy="509976"/>
           </a:xfrm>
         </p:spPr>
         <p:txBody>
@@ -3470,39 +2736,39 @@
           <a:lstStyle>
             <a:lvl1pPr marL="0" indent="0">
               <a:buNone/>
-              <a:defRPr sz="223"/>
+              <a:defRPr sz="214"/>
             </a:lvl1pPr>
-            <a:lvl2pPr marL="63597" indent="0">
-              <a:buNone/>
-              <a:defRPr sz="195"/>
+            <a:lvl2pPr marL="61173" indent="0">
+              <a:buNone/>
+              <a:defRPr sz="187"/>
             </a:lvl2pPr>
-            <a:lvl3pPr marL="127193" indent="0">
-              <a:buNone/>
-              <a:defRPr sz="167"/>
+            <a:lvl3pPr marL="122347" indent="0">
+              <a:buNone/>
+              <a:defRPr sz="161"/>
             </a:lvl3pPr>
-            <a:lvl4pPr marL="190790" indent="0">
-              <a:buNone/>
-              <a:defRPr sz="139"/>
+            <a:lvl4pPr marL="183520" indent="0">
+              <a:buNone/>
+              <a:defRPr sz="134"/>
             </a:lvl4pPr>
-            <a:lvl5pPr marL="254386" indent="0">
-              <a:buNone/>
-              <a:defRPr sz="139"/>
+            <a:lvl5pPr marL="244693" indent="0">
+              <a:buNone/>
+              <a:defRPr sz="134"/>
             </a:lvl5pPr>
-            <a:lvl6pPr marL="317983" indent="0">
-              <a:buNone/>
-              <a:defRPr sz="139"/>
+            <a:lvl6pPr marL="305867" indent="0">
+              <a:buNone/>
+              <a:defRPr sz="134"/>
             </a:lvl6pPr>
-            <a:lvl7pPr marL="381579" indent="0">
-              <a:buNone/>
-              <a:defRPr sz="139"/>
+            <a:lvl7pPr marL="367040" indent="0">
+              <a:buNone/>
+              <a:defRPr sz="134"/>
             </a:lvl7pPr>
-            <a:lvl8pPr marL="445176" indent="0">
-              <a:buNone/>
-              <a:defRPr sz="139"/>
+            <a:lvl8pPr marL="428214" indent="0">
+              <a:buNone/>
+              <a:defRPr sz="134"/>
             </a:lvl8pPr>
-            <a:lvl9pPr marL="508772" indent="0">
-              <a:buNone/>
-              <a:defRPr sz="139"/>
+            <a:lvl9pPr marL="489387" indent="0">
+              <a:buNone/>
+              <a:defRPr sz="134"/>
             </a:lvl9pPr>
           </a:lstStyle>
           <a:p>
@@ -3531,7 +2797,7 @@
           <a:p>
             <a:fld id="{CF9FBDB8-36C6-4744-999D-C99C2C96D370}" type="datetimeFigureOut">
               <a:rPr lang="en-DE" smtClean="0"/>
-              <a:t>13.05.26</a:t>
+              <a:t>15.05.26</a:t>
             </a:fld>
             <a:endParaRPr lang="en-DE"/>
           </a:p>
@@ -3582,7 +2848,7 @@
     </p:spTree>
     <p:extLst>
       <p:ext uri="{BB962C8B-B14F-4D97-AF65-F5344CB8AC3E}">
-        <p14:creationId xmlns:p14="http://schemas.microsoft.com/office/powerpoint/2010/main" val="3860239088"/>
+        <p14:creationId xmlns:p14="http://schemas.microsoft.com/office/powerpoint/2010/main" val="1003460945"/>
       </p:ext>
     </p:extLst>
   </p:cSld>
@@ -3626,8 +2892,8 @@
         </p:nvSpPr>
         <p:spPr>
           <a:xfrm>
-            <a:off x="143520" y="50796"/>
-            <a:ext cx="1800523" cy="184413"/>
+            <a:off x="113834" y="48853"/>
+            <a:ext cx="1428096" cy="177355"/>
           </a:xfrm>
           <a:prstGeom prst="rect">
             <a:avLst/>
@@ -3659,8 +2925,8 @@
         </p:nvSpPr>
         <p:spPr>
           <a:xfrm>
-            <a:off x="143520" y="253982"/>
-            <a:ext cx="1800523" cy="605360"/>
+            <a:off x="113834" y="244262"/>
+            <a:ext cx="1428096" cy="582193"/>
           </a:xfrm>
           <a:prstGeom prst="rect">
             <a:avLst/>
@@ -3721,8 +2987,8 @@
         </p:nvSpPr>
         <p:spPr>
           <a:xfrm>
-            <a:off x="143520" y="884298"/>
-            <a:ext cx="469702" cy="50796"/>
+            <a:off x="113834" y="850456"/>
+            <a:ext cx="372547" cy="48852"/>
           </a:xfrm>
           <a:prstGeom prst="rect">
             <a:avLst/>
@@ -3732,7 +2998,7 @@
           <a:bodyPr vert="horz" lIns="91440" tIns="45720" rIns="91440" bIns="45720" rtlCol="0" anchor="ctr"/>
           <a:lstStyle>
             <a:lvl1pPr algn="l">
-              <a:defRPr sz="167">
+              <a:defRPr sz="161">
                 <a:solidFill>
                   <a:schemeClr val="tx1">
                     <a:tint val="82000"/>
@@ -3744,7 +3010,7 @@
           <a:p>
             <a:fld id="{CF9FBDB8-36C6-4744-999D-C99C2C96D370}" type="datetimeFigureOut">
               <a:rPr lang="en-DE" smtClean="0"/>
-              <a:t>13.05.26</a:t>
+              <a:t>15.05.26</a:t>
             </a:fld>
             <a:endParaRPr lang="en-DE"/>
           </a:p>
@@ -3762,8 +3028,8 @@
         </p:nvSpPr>
         <p:spPr>
           <a:xfrm>
-            <a:off x="691505" y="884298"/>
-            <a:ext cx="704553" cy="50796"/>
+            <a:off x="548472" y="850456"/>
+            <a:ext cx="558820" cy="48852"/>
           </a:xfrm>
           <a:prstGeom prst="rect">
             <a:avLst/>
@@ -3773,7 +3039,7 @@
           <a:bodyPr vert="horz" lIns="91440" tIns="45720" rIns="91440" bIns="45720" rtlCol="0" anchor="ctr"/>
           <a:lstStyle>
             <a:lvl1pPr algn="ctr">
-              <a:defRPr sz="167">
+              <a:defRPr sz="161">
                 <a:solidFill>
                   <a:schemeClr val="tx1">
                     <a:tint val="82000"/>
@@ -3799,8 +3065,8 @@
         </p:nvSpPr>
         <p:spPr>
           <a:xfrm>
-            <a:off x="1474341" y="884298"/>
-            <a:ext cx="469702" cy="50796"/>
+            <a:off x="1169382" y="850456"/>
+            <a:ext cx="372547" cy="48852"/>
           </a:xfrm>
           <a:prstGeom prst="rect">
             <a:avLst/>
@@ -3810,7 +3076,7 @@
           <a:bodyPr vert="horz" lIns="91440" tIns="45720" rIns="91440" bIns="45720" rtlCol="0" anchor="ctr"/>
           <a:lstStyle>
             <a:lvl1pPr algn="r">
-              <a:defRPr sz="167">
+              <a:defRPr sz="161">
                 <a:solidFill>
                   <a:schemeClr val="tx1">
                     <a:tint val="82000"/>
@@ -3831,27 +3097,27 @@
     </p:spTree>
     <p:extLst>
       <p:ext uri="{BB962C8B-B14F-4D97-AF65-F5344CB8AC3E}">
-        <p14:creationId xmlns:p14="http://schemas.microsoft.com/office/powerpoint/2010/main" val="3679950478"/>
+        <p14:creationId xmlns:p14="http://schemas.microsoft.com/office/powerpoint/2010/main" val="3173734181"/>
       </p:ext>
     </p:extLst>
   </p:cSld>
   <p:clrMap bg1="lt1" tx1="dk1" bg2="lt2" tx2="dk2" accent1="accent1" accent2="accent2" accent3="accent3" accent4="accent4" accent5="accent5" accent6="accent6" hlink="hlink" folHlink="folHlink"/>
   <p:sldLayoutIdLst>
-    <p:sldLayoutId id="2147483997" r:id="rId1"/>
-    <p:sldLayoutId id="2147483998" r:id="rId2"/>
-    <p:sldLayoutId id="2147483999" r:id="rId3"/>
-    <p:sldLayoutId id="2147484000" r:id="rId4"/>
-    <p:sldLayoutId id="2147484001" r:id="rId5"/>
-    <p:sldLayoutId id="2147484002" r:id="rId6"/>
-    <p:sldLayoutId id="2147484003" r:id="rId7"/>
-    <p:sldLayoutId id="2147484004" r:id="rId8"/>
-    <p:sldLayoutId id="2147484005" r:id="rId9"/>
-    <p:sldLayoutId id="2147484006" r:id="rId10"/>
-    <p:sldLayoutId id="2147484007" r:id="rId11"/>
+    <p:sldLayoutId id="2147484069" r:id="rId1"/>
+    <p:sldLayoutId id="2147484070" r:id="rId2"/>
+    <p:sldLayoutId id="2147484071" r:id="rId3"/>
+    <p:sldLayoutId id="2147484072" r:id="rId4"/>
+    <p:sldLayoutId id="2147484073" r:id="rId5"/>
+    <p:sldLayoutId id="2147484074" r:id="rId6"/>
+    <p:sldLayoutId id="2147484075" r:id="rId7"/>
+    <p:sldLayoutId id="2147484076" r:id="rId8"/>
+    <p:sldLayoutId id="2147484077" r:id="rId9"/>
+    <p:sldLayoutId id="2147484078" r:id="rId10"/>
+    <p:sldLayoutId id="2147484079" r:id="rId11"/>
   </p:sldLayoutIdLst>
   <p:txStyles>
     <p:titleStyle>
-      <a:lvl1pPr algn="l" defTabSz="127193" rtl="0" eaLnBrk="1" latinLnBrk="0" hangingPunct="1">
+      <a:lvl1pPr algn="l" defTabSz="122347" rtl="0" eaLnBrk="1" latinLnBrk="0" hangingPunct="1">
         <a:lnSpc>
           <a:spcPct val="90000"/>
         </a:lnSpc>
@@ -3859,7 +3125,7 @@
           <a:spcPct val="0"/>
         </a:spcBef>
         <a:buNone/>
-        <a:defRPr sz="612" kern="1200">
+        <a:defRPr sz="589" kern="1200">
           <a:solidFill>
             <a:schemeClr val="tx1"/>
           </a:solidFill>
@@ -3870,16 +3136,16 @@
       </a:lvl1pPr>
     </p:titleStyle>
     <p:bodyStyle>
-      <a:lvl1pPr marL="31798" indent="-31798" algn="l" defTabSz="127193" rtl="0" eaLnBrk="1" latinLnBrk="0" hangingPunct="1">
+      <a:lvl1pPr marL="30587" indent="-30587" algn="l" defTabSz="122347" rtl="0" eaLnBrk="1" latinLnBrk="0" hangingPunct="1">
         <a:lnSpc>
           <a:spcPct val="90000"/>
         </a:lnSpc>
         <a:spcBef>
-          <a:spcPts val="139"/>
+          <a:spcPts val="134"/>
         </a:spcBef>
         <a:buFont typeface="Arial" panose="020B0604020202020204" pitchFamily="34" charset="0"/>
         <a:buChar char="•"/>
-        <a:defRPr sz="389" kern="1200">
+        <a:defRPr sz="375" kern="1200">
           <a:solidFill>
             <a:schemeClr val="tx1"/>
           </a:solidFill>
@@ -3888,16 +3154,16 @@
           <a:cs typeface="+mn-cs"/>
         </a:defRPr>
       </a:lvl1pPr>
-      <a:lvl2pPr marL="95395" indent="-31798" algn="l" defTabSz="127193" rtl="0" eaLnBrk="1" latinLnBrk="0" hangingPunct="1">
+      <a:lvl2pPr marL="91760" indent="-30587" algn="l" defTabSz="122347" rtl="0" eaLnBrk="1" latinLnBrk="0" hangingPunct="1">
         <a:lnSpc>
           <a:spcPct val="90000"/>
         </a:lnSpc>
         <a:spcBef>
-          <a:spcPts val="70"/>
+          <a:spcPts val="67"/>
         </a:spcBef>
         <a:buFont typeface="Arial" panose="020B0604020202020204" pitchFamily="34" charset="0"/>
         <a:buChar char="•"/>
-        <a:defRPr sz="334" kern="1200">
+        <a:defRPr sz="321" kern="1200">
           <a:solidFill>
             <a:schemeClr val="tx1"/>
           </a:solidFill>
@@ -3906,16 +3172,16 @@
           <a:cs typeface="+mn-cs"/>
         </a:defRPr>
       </a:lvl2pPr>
-      <a:lvl3pPr marL="158991" indent="-31798" algn="l" defTabSz="127193" rtl="0" eaLnBrk="1" latinLnBrk="0" hangingPunct="1">
+      <a:lvl3pPr marL="152933" indent="-30587" algn="l" defTabSz="122347" rtl="0" eaLnBrk="1" latinLnBrk="0" hangingPunct="1">
         <a:lnSpc>
           <a:spcPct val="90000"/>
         </a:lnSpc>
         <a:spcBef>
-          <a:spcPts val="70"/>
+          <a:spcPts val="67"/>
         </a:spcBef>
         <a:buFont typeface="Arial" panose="020B0604020202020204" pitchFamily="34" charset="0"/>
         <a:buChar char="•"/>
-        <a:defRPr sz="278" kern="1200">
+        <a:defRPr sz="268" kern="1200">
           <a:solidFill>
             <a:schemeClr val="tx1"/>
           </a:solidFill>
@@ -3924,16 +3190,16 @@
           <a:cs typeface="+mn-cs"/>
         </a:defRPr>
       </a:lvl3pPr>
-      <a:lvl4pPr marL="222588" indent="-31798" algn="l" defTabSz="127193" rtl="0" eaLnBrk="1" latinLnBrk="0" hangingPunct="1">
+      <a:lvl4pPr marL="214107" indent="-30587" algn="l" defTabSz="122347" rtl="0" eaLnBrk="1" latinLnBrk="0" hangingPunct="1">
         <a:lnSpc>
           <a:spcPct val="90000"/>
         </a:lnSpc>
         <a:spcBef>
-          <a:spcPts val="70"/>
+          <a:spcPts val="67"/>
         </a:spcBef>
         <a:buFont typeface="Arial" panose="020B0604020202020204" pitchFamily="34" charset="0"/>
         <a:buChar char="•"/>
-        <a:defRPr sz="250" kern="1200">
+        <a:defRPr sz="241" kern="1200">
           <a:solidFill>
             <a:schemeClr val="tx1"/>
           </a:solidFill>
@@ -3942,16 +3208,16 @@
           <a:cs typeface="+mn-cs"/>
         </a:defRPr>
       </a:lvl4pPr>
-      <a:lvl5pPr marL="286184" indent="-31798" algn="l" defTabSz="127193" rtl="0" eaLnBrk="1" latinLnBrk="0" hangingPunct="1">
+      <a:lvl5pPr marL="275280" indent="-30587" algn="l" defTabSz="122347" rtl="0" eaLnBrk="1" latinLnBrk="0" hangingPunct="1">
         <a:lnSpc>
           <a:spcPct val="90000"/>
         </a:lnSpc>
         <a:spcBef>
-          <a:spcPts val="70"/>
+          <a:spcPts val="67"/>
         </a:spcBef>
         <a:buFont typeface="Arial" panose="020B0604020202020204" pitchFamily="34" charset="0"/>
         <a:buChar char="•"/>
-        <a:defRPr sz="250" kern="1200">
+        <a:defRPr sz="241" kern="1200">
           <a:solidFill>
             <a:schemeClr val="tx1"/>
           </a:solidFill>
@@ -3960,16 +3226,16 @@
           <a:cs typeface="+mn-cs"/>
         </a:defRPr>
       </a:lvl5pPr>
-      <a:lvl6pPr marL="349781" indent="-31798" algn="l" defTabSz="127193" rtl="0" eaLnBrk="1" latinLnBrk="0" hangingPunct="1">
+      <a:lvl6pPr marL="336453" indent="-30587" algn="l" defTabSz="122347" rtl="0" eaLnBrk="1" latinLnBrk="0" hangingPunct="1">
         <a:lnSpc>
           <a:spcPct val="90000"/>
         </a:lnSpc>
         <a:spcBef>
-          <a:spcPts val="70"/>
+          <a:spcPts val="67"/>
         </a:spcBef>
         <a:buFont typeface="Arial" panose="020B0604020202020204" pitchFamily="34" charset="0"/>
         <a:buChar char="•"/>
-        <a:defRPr sz="250" kern="1200">
+        <a:defRPr sz="241" kern="1200">
           <a:solidFill>
             <a:schemeClr val="tx1"/>
           </a:solidFill>
@@ -3978,16 +3244,16 @@
           <a:cs typeface="+mn-cs"/>
         </a:defRPr>
       </a:lvl6pPr>
-      <a:lvl7pPr marL="413377" indent="-31798" algn="l" defTabSz="127193" rtl="0" eaLnBrk="1" latinLnBrk="0" hangingPunct="1">
+      <a:lvl7pPr marL="397627" indent="-30587" algn="l" defTabSz="122347" rtl="0" eaLnBrk="1" latinLnBrk="0" hangingPunct="1">
         <a:lnSpc>
           <a:spcPct val="90000"/>
         </a:lnSpc>
         <a:spcBef>
-          <a:spcPts val="70"/>
+          <a:spcPts val="67"/>
         </a:spcBef>
         <a:buFont typeface="Arial" panose="020B0604020202020204" pitchFamily="34" charset="0"/>
         <a:buChar char="•"/>
-        <a:defRPr sz="250" kern="1200">
+        <a:defRPr sz="241" kern="1200">
           <a:solidFill>
             <a:schemeClr val="tx1"/>
           </a:solidFill>
@@ -3996,16 +3262,16 @@
           <a:cs typeface="+mn-cs"/>
         </a:defRPr>
       </a:lvl7pPr>
-      <a:lvl8pPr marL="476974" indent="-31798" algn="l" defTabSz="127193" rtl="0" eaLnBrk="1" latinLnBrk="0" hangingPunct="1">
+      <a:lvl8pPr marL="458800" indent="-30587" algn="l" defTabSz="122347" rtl="0" eaLnBrk="1" latinLnBrk="0" hangingPunct="1">
         <a:lnSpc>
           <a:spcPct val="90000"/>
         </a:lnSpc>
         <a:spcBef>
-          <a:spcPts val="70"/>
+          <a:spcPts val="67"/>
         </a:spcBef>
         <a:buFont typeface="Arial" panose="020B0604020202020204" pitchFamily="34" charset="0"/>
         <a:buChar char="•"/>
-        <a:defRPr sz="250" kern="1200">
+        <a:defRPr sz="241" kern="1200">
           <a:solidFill>
             <a:schemeClr val="tx1"/>
           </a:solidFill>
@@ -4014,16 +3280,16 @@
           <a:cs typeface="+mn-cs"/>
         </a:defRPr>
       </a:lvl8pPr>
-      <a:lvl9pPr marL="540570" indent="-31798" algn="l" defTabSz="127193" rtl="0" eaLnBrk="1" latinLnBrk="0" hangingPunct="1">
+      <a:lvl9pPr marL="519974" indent="-30587" algn="l" defTabSz="122347" rtl="0" eaLnBrk="1" latinLnBrk="0" hangingPunct="1">
         <a:lnSpc>
           <a:spcPct val="90000"/>
         </a:lnSpc>
         <a:spcBef>
-          <a:spcPts val="70"/>
+          <a:spcPts val="67"/>
         </a:spcBef>
         <a:buFont typeface="Arial" panose="020B0604020202020204" pitchFamily="34" charset="0"/>
         <a:buChar char="•"/>
-        <a:defRPr sz="250" kern="1200">
+        <a:defRPr sz="241" kern="1200">
           <a:solidFill>
             <a:schemeClr val="tx1"/>
           </a:solidFill>
@@ -4037,8 +3303,8 @@
       <a:defPPr>
         <a:defRPr lang="en-US"/>
       </a:defPPr>
-      <a:lvl1pPr marL="0" algn="l" defTabSz="127193" rtl="0" eaLnBrk="1" latinLnBrk="0" hangingPunct="1">
-        <a:defRPr sz="250" kern="1200">
+      <a:lvl1pPr marL="0" algn="l" defTabSz="122347" rtl="0" eaLnBrk="1" latinLnBrk="0" hangingPunct="1">
+        <a:defRPr sz="241" kern="1200">
           <a:solidFill>
             <a:schemeClr val="tx1"/>
           </a:solidFill>
@@ -4047,8 +3313,8 @@
           <a:cs typeface="+mn-cs"/>
         </a:defRPr>
       </a:lvl1pPr>
-      <a:lvl2pPr marL="63597" algn="l" defTabSz="127193" rtl="0" eaLnBrk="1" latinLnBrk="0" hangingPunct="1">
-        <a:defRPr sz="250" kern="1200">
+      <a:lvl2pPr marL="61173" algn="l" defTabSz="122347" rtl="0" eaLnBrk="1" latinLnBrk="0" hangingPunct="1">
+        <a:defRPr sz="241" kern="1200">
           <a:solidFill>
             <a:schemeClr val="tx1"/>
           </a:solidFill>
@@ -4057,8 +3323,8 @@
           <a:cs typeface="+mn-cs"/>
         </a:defRPr>
       </a:lvl2pPr>
-      <a:lvl3pPr marL="127193" algn="l" defTabSz="127193" rtl="0" eaLnBrk="1" latinLnBrk="0" hangingPunct="1">
-        <a:defRPr sz="250" kern="1200">
+      <a:lvl3pPr marL="122347" algn="l" defTabSz="122347" rtl="0" eaLnBrk="1" latinLnBrk="0" hangingPunct="1">
+        <a:defRPr sz="241" kern="1200">
           <a:solidFill>
             <a:schemeClr val="tx1"/>
           </a:solidFill>
@@ -4067,8 +3333,8 @@
           <a:cs typeface="+mn-cs"/>
         </a:defRPr>
       </a:lvl3pPr>
-      <a:lvl4pPr marL="190790" algn="l" defTabSz="127193" rtl="0" eaLnBrk="1" latinLnBrk="0" hangingPunct="1">
-        <a:defRPr sz="250" kern="1200">
+      <a:lvl4pPr marL="183520" algn="l" defTabSz="122347" rtl="0" eaLnBrk="1" latinLnBrk="0" hangingPunct="1">
+        <a:defRPr sz="241" kern="1200">
           <a:solidFill>
             <a:schemeClr val="tx1"/>
           </a:solidFill>
@@ -4077,8 +3343,8 @@
           <a:cs typeface="+mn-cs"/>
         </a:defRPr>
       </a:lvl4pPr>
-      <a:lvl5pPr marL="254386" algn="l" defTabSz="127193" rtl="0" eaLnBrk="1" latinLnBrk="0" hangingPunct="1">
-        <a:defRPr sz="250" kern="1200">
+      <a:lvl5pPr marL="244693" algn="l" defTabSz="122347" rtl="0" eaLnBrk="1" latinLnBrk="0" hangingPunct="1">
+        <a:defRPr sz="241" kern="1200">
           <a:solidFill>
             <a:schemeClr val="tx1"/>
           </a:solidFill>
@@ -4087,8 +3353,8 @@
           <a:cs typeface="+mn-cs"/>
         </a:defRPr>
       </a:lvl5pPr>
-      <a:lvl6pPr marL="317983" algn="l" defTabSz="127193" rtl="0" eaLnBrk="1" latinLnBrk="0" hangingPunct="1">
-        <a:defRPr sz="250" kern="1200">
+      <a:lvl6pPr marL="305867" algn="l" defTabSz="122347" rtl="0" eaLnBrk="1" latinLnBrk="0" hangingPunct="1">
+        <a:defRPr sz="241" kern="1200">
           <a:solidFill>
             <a:schemeClr val="tx1"/>
           </a:solidFill>
@@ -4097,8 +3363,8 @@
           <a:cs typeface="+mn-cs"/>
         </a:defRPr>
       </a:lvl6pPr>
-      <a:lvl7pPr marL="381579" algn="l" defTabSz="127193" rtl="0" eaLnBrk="1" latinLnBrk="0" hangingPunct="1">
-        <a:defRPr sz="250" kern="1200">
+      <a:lvl7pPr marL="367040" algn="l" defTabSz="122347" rtl="0" eaLnBrk="1" latinLnBrk="0" hangingPunct="1">
+        <a:defRPr sz="241" kern="1200">
           <a:solidFill>
             <a:schemeClr val="tx1"/>
           </a:solidFill>
@@ -4107,8 +3373,8 @@
           <a:cs typeface="+mn-cs"/>
         </a:defRPr>
       </a:lvl7pPr>
-      <a:lvl8pPr marL="445176" algn="l" defTabSz="127193" rtl="0" eaLnBrk="1" latinLnBrk="0" hangingPunct="1">
-        <a:defRPr sz="250" kern="1200">
+      <a:lvl8pPr marL="428214" algn="l" defTabSz="122347" rtl="0" eaLnBrk="1" latinLnBrk="0" hangingPunct="1">
+        <a:defRPr sz="241" kern="1200">
           <a:solidFill>
             <a:schemeClr val="tx1"/>
           </a:solidFill>
@@ -4117,8 +3383,8 @@
           <a:cs typeface="+mn-cs"/>
         </a:defRPr>
       </a:lvl8pPr>
-      <a:lvl9pPr marL="508772" algn="l" defTabSz="127193" rtl="0" eaLnBrk="1" latinLnBrk="0" hangingPunct="1">
-        <a:defRPr sz="250" kern="1200">
+      <a:lvl9pPr marL="489387" algn="l" defTabSz="122347" rtl="0" eaLnBrk="1" latinLnBrk="0" hangingPunct="1">
+        <a:defRPr sz="241" kern="1200">
           <a:solidFill>
             <a:schemeClr val="tx1"/>
           </a:solidFill>
@@ -4151,10 +3417,10 @@
       </p:grpSpPr>
       <p:pic>
         <p:nvPicPr>
-          <p:cNvPr id="12" name="Picture 11">
+          <p:cNvPr id="4" name="Picture 3">
             <a:extLst>
               <a:ext uri="{FF2B5EF4-FFF2-40B4-BE49-F238E27FC236}">
-                <a16:creationId xmlns:a16="http://schemas.microsoft.com/office/drawing/2014/main" id="{9492908A-BA63-6C60-4F91-A1A8604028DE}"/>
+                <a16:creationId xmlns:a16="http://schemas.microsoft.com/office/drawing/2014/main" id="{BC1F6AD0-4130-E03F-AE09-687438194AA0}"/>
               </a:ext>
             </a:extLst>
           </p:cNvPr>
@@ -4171,8 +3437,8 @@
         </p:blipFill>
         <p:spPr>
           <a:xfrm>
-            <a:off x="1142982" y="32318"/>
-            <a:ext cx="947007" cy="395273"/>
+            <a:off x="429428" y="480416"/>
+            <a:ext cx="426946" cy="426946"/>
           </a:xfrm>
           <a:prstGeom prst="rect">
             <a:avLst/>
@@ -4181,10 +3447,10 @@
       </p:pic>
       <p:pic>
         <p:nvPicPr>
-          <p:cNvPr id="10" name="Picture 9">
+          <p:cNvPr id="5" name="Picture 4">
             <a:extLst>
               <a:ext uri="{FF2B5EF4-FFF2-40B4-BE49-F238E27FC236}">
-                <a16:creationId xmlns:a16="http://schemas.microsoft.com/office/drawing/2014/main" id="{EA719A0A-7D20-1E23-C142-2EF1E0D3E265}"/>
+                <a16:creationId xmlns:a16="http://schemas.microsoft.com/office/drawing/2014/main" id="{4DEFE97D-809A-F6E8-A60F-729756E93FF5}"/>
               </a:ext>
             </a:extLst>
           </p:cNvPr>
@@ -4201,8 +3467,8 @@
         </p:blipFill>
         <p:spPr>
           <a:xfrm>
-            <a:off x="378303" y="530554"/>
-            <a:ext cx="424496" cy="424496"/>
+            <a:off x="3068" y="480416"/>
+            <a:ext cx="426945" cy="426945"/>
           </a:xfrm>
           <a:prstGeom prst="rect">
             <a:avLst/>
@@ -4211,10 +3477,10 @@
       </p:pic>
       <p:pic>
         <p:nvPicPr>
-          <p:cNvPr id="8" name="Picture 7">
+          <p:cNvPr id="6" name="Picture 5">
             <a:extLst>
               <a:ext uri="{FF2B5EF4-FFF2-40B4-BE49-F238E27FC236}">
-                <a16:creationId xmlns:a16="http://schemas.microsoft.com/office/drawing/2014/main" id="{82690671-7FD8-89CB-95B5-E50F61D4E271}"/>
+                <a16:creationId xmlns:a16="http://schemas.microsoft.com/office/drawing/2014/main" id="{4328C48A-67CF-1218-63FA-31E0C87E5090}"/>
               </a:ext>
             </a:extLst>
           </p:cNvPr>
@@ -4231,8 +3497,8 @@
         </p:blipFill>
         <p:spPr>
           <a:xfrm>
-            <a:off x="7198" y="536553"/>
-            <a:ext cx="418848" cy="418848"/>
+            <a:off x="31643" y="19291"/>
+            <a:ext cx="707050" cy="441907"/>
           </a:xfrm>
           <a:prstGeom prst="rect">
             <a:avLst/>
@@ -4241,10 +3507,10 @@
       </p:pic>
       <p:pic>
         <p:nvPicPr>
-          <p:cNvPr id="3" name="Picture 2">
+          <p:cNvPr id="7" name="Picture 6">
             <a:extLst>
               <a:ext uri="{FF2B5EF4-FFF2-40B4-BE49-F238E27FC236}">
-                <a16:creationId xmlns:a16="http://schemas.microsoft.com/office/drawing/2014/main" id="{A1791013-F2B5-74F0-C010-E44570A0F2E0}"/>
+                <a16:creationId xmlns:a16="http://schemas.microsoft.com/office/drawing/2014/main" id="{742C4FE3-B47C-85DF-DFB7-FA551F75D5AF}"/>
               </a:ext>
             </a:extLst>
           </p:cNvPr>
@@ -4261,8 +3527,8 @@
         </p:blipFill>
         <p:spPr>
           <a:xfrm>
-            <a:off x="19757" y="6350"/>
-            <a:ext cx="1139594" cy="525967"/>
+            <a:off x="856572" y="13157"/>
+            <a:ext cx="741662" cy="444997"/>
           </a:xfrm>
           <a:prstGeom prst="rect">
             <a:avLst/>
@@ -4271,10 +3537,10 @@
       </p:pic>
       <p:sp>
         <p:nvSpPr>
-          <p:cNvPr id="46" name="TextBox 45">
+          <p:cNvPr id="8" name="TextBox 7">
             <a:extLst>
               <a:ext uri="{FF2B5EF4-FFF2-40B4-BE49-F238E27FC236}">
-                <a16:creationId xmlns:a16="http://schemas.microsoft.com/office/drawing/2014/main" id="{3B3B7556-F9A6-2C7F-E175-79E6CD240DEC}"/>
+                <a16:creationId xmlns:a16="http://schemas.microsoft.com/office/drawing/2014/main" id="{23C3C05E-9AA2-7DBF-626E-72D75F53C30F}"/>
               </a:ext>
             </a:extLst>
           </p:cNvPr>
@@ -4283,8 +3549,8 @@
         </p:nvSpPr>
         <p:spPr>
           <a:xfrm>
-            <a:off x="4313" y="-39789"/>
-            <a:ext cx="73501" cy="153889"/>
+            <a:off x="-61559" y="-37179"/>
+            <a:ext cx="235750" cy="169277"/>
           </a:xfrm>
           <a:prstGeom prst="rect">
             <a:avLst/>
@@ -4298,7 +3564,7 @@
           <a:lstStyle/>
           <a:p>
             <a:r>
-              <a:rPr lang="en-DE" sz="400" b="1" dirty="0"/>
+              <a:rPr lang="en-DE" sz="500" b="1" dirty="0"/>
               <a:t>A</a:t>
             </a:r>
           </a:p>
@@ -4306,10 +3572,10 @@
       </p:sp>
       <p:sp>
         <p:nvSpPr>
-          <p:cNvPr id="47" name="TextBox 46">
+          <p:cNvPr id="9" name="TextBox 8">
             <a:extLst>
               <a:ext uri="{FF2B5EF4-FFF2-40B4-BE49-F238E27FC236}">
-                <a16:creationId xmlns:a16="http://schemas.microsoft.com/office/drawing/2014/main" id="{FA9586CB-DD53-D141-22AD-A2798502E15F}"/>
+                <a16:creationId xmlns:a16="http://schemas.microsoft.com/office/drawing/2014/main" id="{C6BE9EDE-BEF2-ABB6-E2E9-2D1EC11610F0}"/>
               </a:ext>
             </a:extLst>
           </p:cNvPr>
@@ -4318,8 +3584,8 @@
         </p:nvSpPr>
         <p:spPr>
           <a:xfrm>
-            <a:off x="1112582" y="-35476"/>
-            <a:ext cx="73501" cy="153889"/>
+            <a:off x="714020" y="-37179"/>
+            <a:ext cx="235750" cy="169277"/>
           </a:xfrm>
           <a:prstGeom prst="rect">
             <a:avLst/>
@@ -4333,7 +3599,7 @@
           <a:lstStyle/>
           <a:p>
             <a:r>
-              <a:rPr lang="en-DE" sz="400" b="1" dirty="0"/>
+              <a:rPr lang="en-DE" sz="500" b="1" dirty="0"/>
               <a:t>B</a:t>
             </a:r>
           </a:p>
@@ -4341,10 +3607,10 @@
       </p:sp>
       <p:sp>
         <p:nvSpPr>
-          <p:cNvPr id="48" name="TextBox 47">
+          <p:cNvPr id="10" name="TextBox 9">
             <a:extLst>
               <a:ext uri="{FF2B5EF4-FFF2-40B4-BE49-F238E27FC236}">
-                <a16:creationId xmlns:a16="http://schemas.microsoft.com/office/drawing/2014/main" id="{EB4F7B39-DA50-7002-688B-037D7352BCAD}"/>
+                <a16:creationId xmlns:a16="http://schemas.microsoft.com/office/drawing/2014/main" id="{6AF9F758-F66C-40AC-B204-E43F03F5446E}"/>
               </a:ext>
             </a:extLst>
           </p:cNvPr>
@@ -4353,8 +3619,8 @@
         </p:nvSpPr>
         <p:spPr>
           <a:xfrm>
-            <a:off x="190548" y="516486"/>
-            <a:ext cx="301310" cy="138500"/>
+            <a:off x="-86236" y="403379"/>
+            <a:ext cx="235750" cy="169277"/>
           </a:xfrm>
           <a:prstGeom prst="rect">
             <a:avLst/>
@@ -4368,158 +3634,18 @@
           <a:lstStyle/>
           <a:p>
             <a:r>
-              <a:rPr lang="en-DE" sz="300" dirty="0"/>
-              <a:t>CDS</a:t>
-            </a:r>
-          </a:p>
-        </p:txBody>
-      </p:sp>
-      <p:sp>
-        <p:nvSpPr>
-          <p:cNvPr id="49" name="TextBox 48">
+              <a:rPr lang="en-DE" sz="500" b="1" dirty="0"/>
+              <a:t>C</a:t>
+            </a:r>
+          </a:p>
+        </p:txBody>
+      </p:sp>
+      <p:pic>
+        <p:nvPicPr>
+          <p:cNvPr id="11" name="Picture 10">
             <a:extLst>
               <a:ext uri="{FF2B5EF4-FFF2-40B4-BE49-F238E27FC236}">
-                <a16:creationId xmlns:a16="http://schemas.microsoft.com/office/drawing/2014/main" id="{ED502E07-9660-DEA3-93E3-C7526F7FFA4C}"/>
-              </a:ext>
-            </a:extLst>
-          </p:cNvPr>
-          <p:cNvSpPr txBox="1"/>
-          <p:nvPr/>
-        </p:nvSpPr>
-        <p:spPr>
-          <a:xfrm>
-            <a:off x="411049" y="574122"/>
-            <a:ext cx="507389" cy="138500"/>
-          </a:xfrm>
-          <a:prstGeom prst="rect">
-            <a:avLst/>
-          </a:prstGeom>
-          <a:noFill/>
-        </p:spPr>
-        <p:txBody>
-          <a:bodyPr wrap="square" rtlCol="0">
-            <a:spAutoFit/>
-          </a:bodyPr>
-          <a:lstStyle/>
-          <a:p>
-            <a:r>
-              <a:rPr lang="en-DE" sz="300" dirty="0"/>
-              <a:t>Promoter</a:t>
-            </a:r>
-          </a:p>
-        </p:txBody>
-      </p:sp>
-      <p:sp>
-        <p:nvSpPr>
-          <p:cNvPr id="52" name="TextBox 51">
-            <a:extLst>
-              <a:ext uri="{FF2B5EF4-FFF2-40B4-BE49-F238E27FC236}">
-                <a16:creationId xmlns:a16="http://schemas.microsoft.com/office/drawing/2014/main" id="{28DF3E44-67AC-60FF-2CEC-3BFD1314E5E0}"/>
-              </a:ext>
-            </a:extLst>
-          </p:cNvPr>
-          <p:cNvSpPr txBox="1"/>
-          <p:nvPr/>
-        </p:nvSpPr>
-        <p:spPr>
-          <a:xfrm>
-            <a:off x="-26377" y="464643"/>
-            <a:ext cx="73501" cy="153889"/>
-          </a:xfrm>
-          <a:prstGeom prst="rect">
-            <a:avLst/>
-          </a:prstGeom>
-          <a:noFill/>
-        </p:spPr>
-        <p:txBody>
-          <a:bodyPr wrap="square" rtlCol="0">
-            <a:spAutoFit/>
-          </a:bodyPr>
-          <a:lstStyle/>
-          <a:p>
-            <a:r>
-              <a:rPr lang="en-DE" sz="400" b="1" dirty="0"/>
-              <a:t>C</a:t>
-            </a:r>
-          </a:p>
-        </p:txBody>
-      </p:sp>
-      <p:sp>
-        <p:nvSpPr>
-          <p:cNvPr id="53" name="TextBox 52">
-            <a:extLst>
-              <a:ext uri="{FF2B5EF4-FFF2-40B4-BE49-F238E27FC236}">
-                <a16:creationId xmlns:a16="http://schemas.microsoft.com/office/drawing/2014/main" id="{C72F52F4-0A2F-B10B-E62A-0582F37F2EB5}"/>
-              </a:ext>
-            </a:extLst>
-          </p:cNvPr>
-          <p:cNvSpPr txBox="1"/>
-          <p:nvPr/>
-        </p:nvSpPr>
-        <p:spPr>
-          <a:xfrm>
-            <a:off x="803653" y="459836"/>
-            <a:ext cx="73501" cy="153889"/>
-          </a:xfrm>
-          <a:prstGeom prst="rect">
-            <a:avLst/>
-          </a:prstGeom>
-          <a:noFill/>
-        </p:spPr>
-        <p:txBody>
-          <a:bodyPr wrap="square" rtlCol="0">
-            <a:spAutoFit/>
-          </a:bodyPr>
-          <a:lstStyle/>
-          <a:p>
-            <a:r>
-              <a:rPr lang="en-DE" sz="400" b="1" dirty="0"/>
-              <a:t>D</a:t>
-            </a:r>
-          </a:p>
-        </p:txBody>
-      </p:sp>
-      <p:sp>
-        <p:nvSpPr>
-          <p:cNvPr id="54" name="TextBox 53">
-            <a:extLst>
-              <a:ext uri="{FF2B5EF4-FFF2-40B4-BE49-F238E27FC236}">
-                <a16:creationId xmlns:a16="http://schemas.microsoft.com/office/drawing/2014/main" id="{4CD5B620-11DD-9050-42F7-6B6EE49B8E2D}"/>
-              </a:ext>
-            </a:extLst>
-          </p:cNvPr>
-          <p:cNvSpPr txBox="1"/>
-          <p:nvPr/>
-        </p:nvSpPr>
-        <p:spPr>
-          <a:xfrm>
-            <a:off x="1424964" y="458319"/>
-            <a:ext cx="73501" cy="153889"/>
-          </a:xfrm>
-          <a:prstGeom prst="rect">
-            <a:avLst/>
-          </a:prstGeom>
-          <a:noFill/>
-        </p:spPr>
-        <p:txBody>
-          <a:bodyPr wrap="square" rtlCol="0">
-            <a:spAutoFit/>
-          </a:bodyPr>
-          <a:lstStyle/>
-          <a:p>
-            <a:r>
-              <a:rPr lang="en-DE" sz="400" b="1" dirty="0"/>
-              <a:t>E</a:t>
-            </a:r>
-          </a:p>
-        </p:txBody>
-      </p:sp>
-      <p:pic>
-        <p:nvPicPr>
-          <p:cNvPr id="4" name="Picture 3">
-            <a:extLst>
-              <a:ext uri="{FF2B5EF4-FFF2-40B4-BE49-F238E27FC236}">
-                <a16:creationId xmlns:a16="http://schemas.microsoft.com/office/drawing/2014/main" id="{CFB298D4-5B94-9DDA-4966-E3331B903701}"/>
+                <a16:creationId xmlns:a16="http://schemas.microsoft.com/office/drawing/2014/main" id="{348C8AF8-1EEE-1131-A5F6-62DFECF280BD}"/>
               </a:ext>
             </a:extLst>
           </p:cNvPr>
@@ -4536,48 +3662,88 @@
         </p:blipFill>
         <p:spPr>
           <a:xfrm>
-            <a:off x="840403" y="527379"/>
-            <a:ext cx="636745" cy="424496"/>
+            <a:off x="856545" y="516316"/>
+            <a:ext cx="799072" cy="355143"/>
           </a:xfrm>
           <a:prstGeom prst="rect">
             <a:avLst/>
           </a:prstGeom>
         </p:spPr>
       </p:pic>
-      <p:pic>
-        <p:nvPicPr>
-          <p:cNvPr id="6" name="Picture 5">
+      <p:sp>
+        <p:nvSpPr>
+          <p:cNvPr id="12" name="TextBox 11">
             <a:extLst>
               <a:ext uri="{FF2B5EF4-FFF2-40B4-BE49-F238E27FC236}">
-                <a16:creationId xmlns:a16="http://schemas.microsoft.com/office/drawing/2014/main" id="{056BB62C-C886-29ED-757D-42209A8CEED8}"/>
+                <a16:creationId xmlns:a16="http://schemas.microsoft.com/office/drawing/2014/main" id="{90329C12-A8AF-A5FA-52CB-92859DFCEEC1}"/>
               </a:ext>
             </a:extLst>
           </p:cNvPr>
-          <p:cNvPicPr>
-            <a:picLocks noChangeAspect="1"/>
-          </p:cNvPicPr>
+          <p:cNvSpPr txBox="1"/>
           <p:nvPr/>
-        </p:nvPicPr>
-        <p:blipFill>
-          <a:blip r:embed="rId8"/>
-          <a:stretch>
-            <a:fillRect/>
-          </a:stretch>
-        </p:blipFill>
+        </p:nvSpPr>
         <p:spPr>
           <a:xfrm>
-            <a:off x="1459594" y="529672"/>
-            <a:ext cx="636745" cy="424497"/>
+            <a:off x="342792" y="403379"/>
+            <a:ext cx="235750" cy="169277"/>
           </a:xfrm>
           <a:prstGeom prst="rect">
             <a:avLst/>
           </a:prstGeom>
+          <a:noFill/>
         </p:spPr>
-      </p:pic>
+        <p:txBody>
+          <a:bodyPr wrap="square" rtlCol="0">
+            <a:spAutoFit/>
+          </a:bodyPr>
+          <a:lstStyle/>
+          <a:p>
+            <a:r>
+              <a:rPr lang="en-DE" sz="500" b="1" dirty="0"/>
+              <a:t>D</a:t>
+            </a:r>
+          </a:p>
+        </p:txBody>
+      </p:sp>
+      <p:sp>
+        <p:nvSpPr>
+          <p:cNvPr id="13" name="TextBox 12">
+            <a:extLst>
+              <a:ext uri="{FF2B5EF4-FFF2-40B4-BE49-F238E27FC236}">
+                <a16:creationId xmlns:a16="http://schemas.microsoft.com/office/drawing/2014/main" id="{6F857F63-8294-4A34-B1E6-E9F369B05458}"/>
+              </a:ext>
+            </a:extLst>
+          </p:cNvPr>
+          <p:cNvSpPr txBox="1"/>
+          <p:nvPr/>
+        </p:nvSpPr>
+        <p:spPr>
+          <a:xfrm>
+            <a:off x="771327" y="399993"/>
+            <a:ext cx="235750" cy="169277"/>
+          </a:xfrm>
+          <a:prstGeom prst="rect">
+            <a:avLst/>
+          </a:prstGeom>
+          <a:noFill/>
+        </p:spPr>
+        <p:txBody>
+          <a:bodyPr wrap="square" rtlCol="0">
+            <a:spAutoFit/>
+          </a:bodyPr>
+          <a:lstStyle/>
+          <a:p>
+            <a:r>
+              <a:rPr lang="en-DE" sz="500" b="1" dirty="0"/>
+              <a:t>E</a:t>
+            </a:r>
+          </a:p>
+        </p:txBody>
+      </p:sp>
     </p:spTree>
     <p:extLst>
       <p:ext uri="{BB962C8B-B14F-4D97-AF65-F5344CB8AC3E}">
-        <p14:creationId xmlns:p14="http://schemas.microsoft.com/office/powerpoint/2010/main" val="1135184855"/>
+        <p14:creationId xmlns:p14="http://schemas.microsoft.com/office/powerpoint/2010/main" val="1064014603"/>
       </p:ext>
     </p:extLst>
   </p:cSld>
